--- a/it/slides/09-Architettura_dei_Calcolatori-Algebra_di_Boole_2-Codice.pptx
+++ b/it/slides/09-Architettura_dei_Calcolatori-Algebra_di_Boole_2-Codice.pptx
@@ -122,19 +122,23 @@
   <p:extLst>
     <p:ext uri="{521415D9-36F7-43E2-AB2F-B90AF26B5E84}">
       <p14:sectionLst xmlns:p14="http://schemas.microsoft.com/office/powerpoint/2010/main">
-        <p14:section name="Apertura" id="{d99566f5-97e7-a9b9-5ce6-750335f72e29}">
+        <p14:section name="Apertura" id="{12fdca25-d3bb-4ab3-dc44-b04a14ed9965}">
           <p14:sldIdLst>
             <p14:sldId id="256"/>
             <p14:sldId id="257"/>
           </p14:sldIdLst>
         </p14:section>
-        <p14:section name="I listati" id="{8b88f2c3-73c2-04be-19f1-a4754c3c6abc}">
+        <p14:section name="Riscaldamento sulla macchina" id="{dc151569-c60c-4572-1878-fee511fc24d5}">
           <p14:sldIdLst>
             <p14:sldId id="258"/>
+          </p14:sldIdLst>
+        </p14:section>
+        <p14:section name="Ritorno alla macchina" id="{3e448f9c-999f-e6ee-6907-daf1ab26bc31}">
+          <p14:sldIdLst>
             <p14:sldId id="259"/>
           </p14:sldIdLst>
         </p14:section>
-        <p14:section name="Il programma completo" id="{48bdf099-5045-5931-5c87-f25062e8ad86}">
+        <p14:section name="Il programma completo" id="{ece35a24-2209-b925-4dd7-60c8402cd7b8}">
           <p14:sldIdLst>
             <p14:sldId id="260"/>
             <p14:sldId id="261"/>
@@ -144,7 +148,7 @@
             <p14:sldId id="265"/>
           </p14:sldIdLst>
         </p14:section>
-        <p14:section name="Eseguire e provare" id="{3df8582d-9860-30f0-9790-d0c3551e36d1}">
+        <p14:section name="Eseguire e provare" id="{c6916dd0-b989-074f-9659-1c2c88c481f5}">
           <p14:sldIdLst>
             <p14:sldId id="266"/>
             <p14:sldId id="267"/>
@@ -153,7 +157,7 @@
             <p14:sldId id="270"/>
           </p14:sldIdLst>
         </p14:section>
-        <p14:section name="Esercizi" id="{db0ef5f9-7a37-c32a-fae9-e1beee293dbe}">
+        <p14:section name="Esercizi" id="{2bac4952-2eec-02c8-1e92-12bff6e407c6}">
           <p14:sldIdLst>
             <p14:sldId id="271"/>
           </p14:sldIdLst>
@@ -2871,7 +2875,63 @@
       </p:sp>
       <p:sp>
         <p:nvSpPr>
-          <p:cNvPr id="11" name="Shape 9"/>
+          <p:cNvPr id="11" name="Text 9"/>
+          <p:cNvSpPr txBox="1"/>
+          <p:nvPr/>
+        </p:nvSpPr>
+        <p:spPr>
+          <a:xfrm>
+            <a:off x="4693615" y="566928"/>
+            <a:ext cx="6949440" cy="640080"/>
+          </a:xfrm>
+          <a:prstGeom prst="rect">
+            <a:avLst/>
+          </a:prstGeom>
+          <a:noFill/>
+          <a:ln/>
+        </p:spPr>
+        <p:txBody>
+          <a:bodyPr wrap="square" lIns="0" tIns="0" rIns="0" bIns="0" rtlCol="0" anchor="t"/>
+          <a:lstStyle/>
+          <a:p>
+            <a:pPr algn="r" indent="0" marL="0">
+              <a:buNone/>
+            </a:pPr>
+            <a:r>
+              <a:rPr lang="en-US" sz="1300" dirty="0">
+                <a:solidFill>
+                  <a:srgbClr val="CFE3EA"/>
+                </a:solidFill>
+                <a:latin typeface="Calibri" pitchFamily="34" charset="0"/>
+                <a:ea typeface="Calibri" pitchFamily="34" charset="-122"/>
+                <a:cs typeface="Calibri" pitchFamily="34" charset="-120"/>
+              </a:rPr>
+              <a:t>Presentazione del codice. I concetti, le figure e le domande sono nella presentazione della lezione:</a:t>
+            </a:r>
+            <a:endParaRPr lang="en-US" sz="1300" dirty="0"/>
+          </a:p>
+          <a:p>
+            <a:pPr algn="r" indent="0" marL="0">
+              <a:buNone/>
+            </a:pPr>
+            <a:r>
+              <a:rPr lang="en-US" sz="1300" dirty="0">
+                <a:solidFill>
+                  <a:srgbClr val="CFE3EA"/>
+                </a:solidFill>
+                <a:latin typeface="Calibri" pitchFamily="34" charset="0"/>
+                <a:ea typeface="Calibri" pitchFamily="34" charset="-122"/>
+                <a:cs typeface="Calibri" pitchFamily="34" charset="-120"/>
+              </a:rPr>
+              <a:t>09-Architettura_dei_Calcolatori-Algebra_di_Boole_2.pptx</a:t>
+            </a:r>
+            <a:endParaRPr lang="en-US" sz="1300" dirty="0"/>
+          </a:p>
+        </p:txBody>
+      </p:sp>
+      <p:sp>
+        <p:nvSpPr>
+          <p:cNvPr id="12" name="Shape 10"/>
           <p:cNvSpPr/>
           <p:nvPr/>
         </p:nvSpPr>
@@ -2898,7 +2958,7 @@
       </p:sp>
       <p:pic>
         <p:nvPicPr>
-          <p:cNvPr id="12" name="Image 0" descr="/Users/raffaelemontella/devel/riscv-prg32/computer-architecture-with-prg32/tools/assets/game_tetris.png">    </p:cNvPr>
+          <p:cNvPr id="13" name="Image 0" descr="/Users/raffaelemontella/devel/riscv-prg32/computer-architecture-with-prg32/tools/assets/game_tetris.png">    </p:cNvPr>
           <p:cNvPicPr>
             <a:picLocks noChangeAspect="1"/>
           </p:cNvPicPr>

--- a/it/slides/09-Architettura_dei_Calcolatori-Algebra_di_Boole_2-Codice.pptx
+++ b/it/slides/09-Architettura_dei_Calcolatori-Algebra_di_Boole_2-Codice.pptx
@@ -122,23 +122,23 @@
   <p:extLst>
     <p:ext uri="{521415D9-36F7-43E2-AB2F-B90AF26B5E84}">
       <p14:sectionLst xmlns:p14="http://schemas.microsoft.com/office/powerpoint/2010/main">
-        <p14:section name="Apertura" id="{12fdca25-d3bb-4ab3-dc44-b04a14ed9965}">
+        <p14:section name="Apertura" id="{2a72842c-c373-a774-e3e2-88a1d4fa3dbf}">
           <p14:sldIdLst>
             <p14:sldId id="256"/>
             <p14:sldId id="257"/>
           </p14:sldIdLst>
         </p14:section>
-        <p14:section name="Riscaldamento sulla macchina" id="{dc151569-c60c-4572-1878-fee511fc24d5}">
+        <p14:section name="Riscaldamento sulla macchina" id="{a4b9c61d-a81d-d66f-f2ba-24cce4a5995c}">
           <p14:sldIdLst>
             <p14:sldId id="258"/>
           </p14:sldIdLst>
         </p14:section>
-        <p14:section name="Ritorno alla macchina" id="{3e448f9c-999f-e6ee-6907-daf1ab26bc31}">
+        <p14:section name="Ritorno alla macchina" id="{1d4057fc-49f4-6327-308a-2431bb4c4abc}">
           <p14:sldIdLst>
             <p14:sldId id="259"/>
           </p14:sldIdLst>
         </p14:section>
-        <p14:section name="Il programma completo" id="{ece35a24-2209-b925-4dd7-60c8402cd7b8}">
+        <p14:section name="Il programma completo" id="{2033dcfe-4874-f314-df80-143dd51a08c9}">
           <p14:sldIdLst>
             <p14:sldId id="260"/>
             <p14:sldId id="261"/>
@@ -148,7 +148,7 @@
             <p14:sldId id="265"/>
           </p14:sldIdLst>
         </p14:section>
-        <p14:section name="Eseguire e provare" id="{c6916dd0-b989-074f-9659-1c2c88c481f5}">
+        <p14:section name="Eseguire e provare" id="{c68242b2-1466-a15f-e3b4-da651780c3bf}">
           <p14:sldIdLst>
             <p14:sldId id="266"/>
             <p14:sldId id="267"/>
@@ -157,7 +157,7 @@
             <p14:sldId id="270"/>
           </p14:sldIdLst>
         </p14:section>
-        <p14:section name="Esercizi" id="{2bac4952-2eec-02c8-1e92-12bff6e407c6}">
+        <p14:section name="Esercizi" id="{e5719580-69b7-a2c2-3014-c58b260a4a28}">
           <p14:sldIdLst>
             <p14:sldId id="271"/>
           </p14:sldIdLst>
@@ -566,7 +566,9 @@
           <a:p>
             <a:r>
               <a:rPr lang="en-US" dirty="0"/>
-              <a:t>Questa è la presentazione del codice della Lezione 09. La presentazione della lezione contiene i concetti; questa contiene tutto ciò che si scrive e si esegue: i listati con la loro spiegazione, il programma completo, che cosa mostra, e il modo di provarlo su ciascuno dei tre host.</a:t>
+              <a:t>Questa è la presentazione del codice della Lezione 09. La presentazione della lezione contiene i concetti; questa contiene tutto ciò che si scrive e si esegue: i listati con la loro spiegazione, il programma completo, che cosa mostra, e il modo di provarlo su ciascuno dei tre host.
+Stato di apprendimento: DA COMPRENDERE OGGI, alla fine di questa lezione lo spiegate, lo seguite passo passo e lo applicate da soli; DA UTILIZZARE OGGI, oggi seguite e usate la ricetta; come funziona dentro si spiega più avanti, o non fa parte del corso; DA COMPRENDERE PIÙ AVANTI, riconoscete il nome e lo scopo; lo spiega una lezione successiva. Una slide senza etichetta è contesto: una storia, un esempio, una domanda, un esercizio.
+Stato di apprendimento di questa lezione. DA COMPRENDERE OGGI: il sommatore; le funzioni booleane; le forme canoniche; minimizzazione, Karnaugh. DA UTILIZZARE OGGI: il programma completo, gli strumenti di PRG32 (si usa, non si studia, in questo corso). DA COMPRENDERE PIÙ AVANTI: niente. Una slide senza etichetta è contesto: una storia, un esempio, una domanda, un esercizio.</a:t>
             </a:r>
             <a:endParaRPr lang="en-US" dirty="0"/>
           </a:p>
@@ -655,6 +657,7 @@
             <a:r>
               <a:rPr lang="en-US" dirty="0"/>
               <a:t>Una pagina del programma completo, esattamente com'è nel repository. Leggetelo dall'inizio: l'intestazione dice che cosa mostra il programma e come compilarlo; seguono le tre funzioni init, update e draw, poi i dati. Le righe incontrate nei listati della lezione hanno qui gli stessi commenti.
+DA UTILIZZARE OGGI: il programma completo (si usa, non si studia, in questo corso).
 Per il docente: code/l09.S, come viene compilato ed eseguito dai test. I commenti fanno parte del programma, e sono in inglese come in tutti i listati: leggeteli con il codice.</a:t>
             </a:r>
             <a:endParaRPr lang="en-US" dirty="0"/>
@@ -833,6 +836,7 @@
             <a:r>
               <a:rPr lang="en-US" dirty="0"/>
               <a:t>La via più rapida: PRG32-QT sul vostro computer. Quattro passi, ciascuno con il suo comando. PRG32-QT si comporta come una scheda sulla porta 8080, ed è per questo che il comando di caricamento dice esp32c6. Con la modalità debug abilitata potete fermarvi su qualsiasi istruzione e leggere registri e memoria.
+DA UTILIZZARE OGGI: gli strumenti di PRG32 (si usa, non si studia, in questo corso).
 Per il docente: Eseguito dai test: la cartuccia di questa slide è compilata con questo comando ed eseguita sull'esecutore senza interfaccia di PRG32-QT. Senza la toolchain: importate il file .prg32 in PRG32-QT e scegliete Run Cartridge. Tasti: frecce o WASD per il joystick, Z o J per A, X o K per B, Invio per Start, Esc per tornare a Setup.</a:t>
             </a:r>
             <a:endParaRPr lang="en-US" dirty="0"/>
@@ -922,6 +926,7 @@
             <a:r>
               <a:rPr lang="en-US" dirty="0"/>
               <a:t>Lo stesso programma sull'emulatore. QEMU esegue il firmware vero su un chip emulato, quindi la cartuccia va compilata per l'architettura qemu. Caricate la cartuccia mentre QEMU è chiuso. Il firmware si apre sul menu Setup: scegliete Run Cartridge e lo slot. Ricordate che la tastiera è letta dal terminale, non dalla finestra con l'immagine.
+DA UTILIZZARE OGGI: gli strumenti di PRG32 (si usa, non si studia, in questo corso).
 Per il docente: Verificato dai test fino al caricamento: la cartuccia è compilata per l'architettura qemu e accettata nell'immagine flash dell'emulatore. Ciò che l'emulatore poi mostra non è verificato automaticamente: il QEMU di Espressif ha bisogno della sua finestra. Dall'ottobre 2026 il firmware parte da Setup: scegliete Run Cartridge, poi cart0.</a:t>
             </a:r>
             <a:endParaRPr lang="en-US" dirty="0"/>
@@ -1011,6 +1016,7 @@
             <a:r>
               <a:rPr lang="en-US" dirty="0"/>
               <a:t>Lo stesso programma sul kit. Il firmware si scrive una volta, via USB; dopo, le cartucce viaggiano sul Wi-Fi. Il comando di caricamento è quello usato per PRG32-QT con l'indirizzo della scheda. È l'unico host che i test automatici non eseguono: provatelo, e riferite ciò che vedete.
+DA UTILIZZARE OGGI: gli strumenti di PRG32 (si usa, non si studia, in questo corso).
 Per il docente: Non eseguito dai test: sulla macchina di prova non c'è una scheda. La cartuccia per l'architettura esp32c6 è compilata dai test; i passi sono quelli della documentazione di PRG32. Se la porta seriale non viene trovata, passatela esplicitamente. Per usare il Wi-Fi dell'aula: python3 -m prg32 wifi set --ssid NOME --password PASSWORD --mode sta.</a:t>
             </a:r>
             <a:endParaRPr lang="en-US" dirty="0"/>
@@ -1100,6 +1106,7 @@
             <a:r>
               <a:rPr lang="en-US" dirty="0"/>
               <a:t>I cinque sintomi più comuni, che cosa significa ciascuno, e che cosa fare. Leggete il messaggio prima di cambiare qualcosa: quasi sempre nomina la causa.
+DA UTILIZZARE OGGI: gli strumenti di PRG32 (si usa, non si studia, in questo corso).
 Per il docente: Le prime tre righe coprono la maggior parte dei casi. Quando chiedete aiuto, incollate il comando e l'intero messaggio come testo. docs/usage/troubleshooting.md del repository di PRG32 ha l'elenco completo.</a:t>
             </a:r>
             <a:endParaRPr lang="en-US" dirty="0"/>
@@ -1367,6 +1374,7 @@
             <a:r>
               <a:rPr lang="en-US" dirty="0"/>
               <a:t>La somma di due bit può valere 0, 1 o 2, quindi il risultato richiede due bit. xor dà il bit basso, che vale 1 quando i due ingressi sono diversi; and dà il bit alto, il riporto, che vale 1 solo quando entrambi valgono 1. Il commento sotto il codice è una tabella di verità con due uscite: verificatene le quattro righe. Questa coppia di porte ha un nome, semisommatore. L'ultima nota enuncia il problema del giorno: qui le porte erano date; come si trovano quando si conosce solo la tabella?
+DA COMPRENDERE OGGI: il sommatore.
 Per il docente: Eseguirlo in PRG32-QT con le quattro coppie di ingressi. La Lezione 05 diceva che a un processore per l'aritmetica basta un addizionatore; questo è il suo primo bit.</a:t>
             </a:r>
             <a:endParaRPr lang="en-US" dirty="0"/>
@@ -1456,6 +1464,7 @@
             <a:r>
               <a:rPr lang="en-US" dirty="0"/>
               <a:t>Il sommatore completo scritto come cinque istruzioni, una per porta: due xor per la somma, due and e una or per il riporto uscente. Il programma è lo schema, letto da sinistra a destra. Permette di esercitare entrambi i problemi della Lezione 08. Analisi: eseguitelo passo-passo in PRG32-QT per le otto combinazioni di ingresso e compilate la tabella di verità. Sintesi: ricavate queste porte dalla tabella. Con registri interi in ingresso, le stesse cinque righe lavorano su tutte e trentadue le posizioni di bit insieme.
+DA COMPRENDERE OGGI: il sommatore.
 Per il docente: Attività di laboratorio suggerita: un ciclo sulle otto combinazioni di ingresso che disegna i due bit di uscita come lampade, come nel laboratorio 06.</a:t>
             </a:r>
             <a:endParaRPr lang="en-US" dirty="0"/>
@@ -1545,6 +1554,7 @@
             <a:r>
               <a:rPr lang="en-US" dirty="0"/>
               <a:t>Una pagina del programma completo, esattamente com'è nel repository. Leggetelo dall'inizio: l'intestazione dice che cosa mostra il programma e come compilarlo; seguono le tre funzioni init, update e draw, poi i dati. Le righe incontrate nei listati della lezione hanno qui gli stessi commenti.
+DA UTILIZZARE OGGI: il programma completo (si usa, non si studia, in questo corso).
 Per il docente: code/l09.S, come viene compilato ed eseguito dai test. I commenti fanno parte del programma, e sono in inglese come in tutti i listati: leggeteli con il codice.</a:t>
             </a:r>
             <a:endParaRPr lang="en-US" dirty="0"/>
@@ -1634,6 +1644,7 @@
             <a:r>
               <a:rPr lang="en-US" dirty="0"/>
               <a:t>Una pagina del programma completo, esattamente com'è nel repository. Leggetelo dall'inizio: l'intestazione dice che cosa mostra il programma e come compilarlo; seguono le tre funzioni init, update e draw, poi i dati. Le righe incontrate nei listati della lezione hanno qui gli stessi commenti.
+DA UTILIZZARE OGGI: il programma completo (si usa, non si studia, in questo corso).
 Per il docente: code/l09.S, come viene compilato ed eseguito dai test. I commenti fanno parte del programma, e sono in inglese come in tutti i listati: leggeteli con il codice.</a:t>
             </a:r>
             <a:endParaRPr lang="en-US" dirty="0"/>
@@ -1723,6 +1734,7 @@
             <a:r>
               <a:rPr lang="en-US" dirty="0"/>
               <a:t>Una pagina del programma completo, esattamente com'è nel repository. Leggetelo dall'inizio: l'intestazione dice che cosa mostra il programma e come compilarlo; seguono le tre funzioni init, update e draw, poi i dati. Le righe incontrate nei listati della lezione hanno qui gli stessi commenti.
+DA UTILIZZARE OGGI: il programma completo (si usa, non si studia, in questo corso).
 Per il docente: code/l09.S, come viene compilato ed eseguito dai test. I commenti fanno parte del programma, e sono in inglese come in tutti i listati: leggeteli con il codice.</a:t>
             </a:r>
             <a:endParaRPr lang="en-US" dirty="0"/>
@@ -1812,6 +1824,7 @@
             <a:r>
               <a:rPr lang="en-US" dirty="0"/>
               <a:t>Una pagina del programma completo, esattamente com'è nel repository. Leggetelo dall'inizio: l'intestazione dice che cosa mostra il programma e come compilarlo; seguono le tre funzioni init, update e draw, poi i dati. Le righe incontrate nei listati della lezione hanno qui gli stessi commenti.
+DA UTILIZZARE OGGI: il programma completo (si usa, non si studia, in questo corso).
 Per il docente: code/l09.S, come viene compilato ed eseguito dai test. I commenti fanno parte del programma, e sono in inglese come in tutti i listati: leggeteli con il codice.</a:t>
             </a:r>
             <a:endParaRPr lang="en-US" dirty="0"/>
@@ -1901,6 +1914,7 @@
             <a:r>
               <a:rPr lang="en-US" dirty="0"/>
               <a:t>Una pagina del programma completo, esattamente com'è nel repository. Leggetelo dall'inizio: l'intestazione dice che cosa mostra il programma e come compilarlo; seguono le tre funzioni init, update e draw, poi i dati. Le righe incontrate nei listati della lezione hanno qui gli stessi commenti.
+DA UTILIZZARE OGGI: il programma completo (si usa, non si studia, in questo corso).
 Per il docente: code/l09.S, come viene compilato ed eseguito dai test. I commenti fanno parte del programma, e sono in inglese come in tutti i listati: leggeteli con il codice.</a:t>
             </a:r>
             <a:endParaRPr lang="en-US" dirty="0"/>
@@ -2982,6 +2996,420 @@
       </p:pic>
       <p:sp>
         <p:nvSpPr>
+          <p:cNvPr id="14" name="Shape 11"/>
+          <p:cNvSpPr/>
+          <p:nvPr/>
+        </p:nvSpPr>
+        <p:spPr>
+          <a:xfrm>
+            <a:off x="8910777" y="91440"/>
+            <a:ext cx="2732278" cy="274320"/>
+          </a:xfrm>
+          <a:prstGeom prst="rect">
+            <a:avLst/>
+          </a:prstGeom>
+          <a:solidFill>
+            <a:srgbClr val="F3E8FF"/>
+          </a:solidFill>
+          <a:ln w="12700">
+            <a:solidFill>
+              <a:srgbClr val="7E22CE"/>
+            </a:solidFill>
+            <a:prstDash val="dash"/>
+          </a:ln>
+        </p:spPr>
+      </p:sp>
+      <p:sp>
+        <p:nvSpPr>
+          <p:cNvPr id="15" name="Shape 12"/>
+          <p:cNvSpPr/>
+          <p:nvPr/>
+        </p:nvSpPr>
+        <p:spPr>
+          <a:xfrm>
+            <a:off x="8938209" y="128016"/>
+            <a:ext cx="45720" cy="45720"/>
+          </a:xfrm>
+          <a:prstGeom prst="rect">
+            <a:avLst/>
+          </a:prstGeom>
+          <a:solidFill>
+            <a:srgbClr val="7E22CE"/>
+          </a:solidFill>
+          <a:ln w="12700">
+            <a:solidFill>
+              <a:srgbClr val="7E22CE"/>
+            </a:solidFill>
+            <a:prstDash val="solid"/>
+          </a:ln>
+        </p:spPr>
+      </p:sp>
+      <p:sp>
+        <p:nvSpPr>
+          <p:cNvPr id="16" name="Shape 13"/>
+          <p:cNvSpPr/>
+          <p:nvPr/>
+        </p:nvSpPr>
+        <p:spPr>
+          <a:xfrm>
+            <a:off x="8938209" y="205740"/>
+            <a:ext cx="45720" cy="45720"/>
+          </a:xfrm>
+          <a:prstGeom prst="rect">
+            <a:avLst/>
+          </a:prstGeom>
+          <a:solidFill>
+            <a:srgbClr val="7E22CE"/>
+          </a:solidFill>
+          <a:ln w="12700">
+            <a:solidFill>
+              <a:srgbClr val="7E22CE"/>
+            </a:solidFill>
+            <a:prstDash val="solid"/>
+          </a:ln>
+        </p:spPr>
+      </p:sp>
+      <p:sp>
+        <p:nvSpPr>
+          <p:cNvPr id="17" name="Shape 14"/>
+          <p:cNvSpPr/>
+          <p:nvPr/>
+        </p:nvSpPr>
+        <p:spPr>
+          <a:xfrm>
+            <a:off x="8938209" y="283464"/>
+            <a:ext cx="45720" cy="45720"/>
+          </a:xfrm>
+          <a:prstGeom prst="rect">
+            <a:avLst/>
+          </a:prstGeom>
+          <a:solidFill>
+            <a:srgbClr val="7E22CE"/>
+          </a:solidFill>
+          <a:ln w="12700">
+            <a:solidFill>
+              <a:srgbClr val="7E22CE"/>
+            </a:solidFill>
+            <a:prstDash val="solid"/>
+          </a:ln>
+        </p:spPr>
+      </p:sp>
+      <p:pic>
+        <p:nvPicPr>
+          <p:cNvPr id="18" name="Image 1" descr="preencoded.png">    </p:cNvPr>
+          <p:cNvPicPr>
+            <a:picLocks noChangeAspect="1"/>
+          </p:cNvPicPr>
+          <p:nvPr/>
+        </p:nvPicPr>
+        <p:blipFill>
+          <a:blip r:embed="rId2"/>
+          <a:stretch>
+            <a:fillRect/>
+          </a:stretch>
+        </p:blipFill>
+        <p:spPr>
+          <a:xfrm>
+            <a:off x="9038793" y="128016"/>
+            <a:ext cx="201168" cy="201168"/>
+          </a:xfrm>
+          <a:prstGeom prst="rect">
+            <a:avLst/>
+          </a:prstGeom>
+        </p:spPr>
+      </p:pic>
+      <p:sp>
+        <p:nvSpPr>
+          <p:cNvPr id="19" name="Text 15"/>
+          <p:cNvSpPr txBox="1"/>
+          <p:nvPr/>
+        </p:nvSpPr>
+        <p:spPr>
+          <a:xfrm>
+            <a:off x="9294825" y="91440"/>
+            <a:ext cx="2311654" cy="274320"/>
+          </a:xfrm>
+          <a:prstGeom prst="rect">
+            <a:avLst/>
+          </a:prstGeom>
+          <a:noFill/>
+          <a:ln/>
+        </p:spPr>
+        <p:txBody>
+          <a:bodyPr wrap="square" lIns="0" tIns="0" rIns="0" bIns="0" rtlCol="0" anchor="ctr"/>
+          <a:lstStyle/>
+          <a:p>
+            <a:pPr indent="0" marL="0">
+              <a:buNone/>
+            </a:pPr>
+            <a:r>
+              <a:rPr lang="en-US" sz="1100" b="1" dirty="0">
+                <a:solidFill>
+                  <a:srgbClr val="6B21A8"/>
+                </a:solidFill>
+                <a:latin typeface="Calibri" pitchFamily="34" charset="0"/>
+                <a:ea typeface="Calibri" pitchFamily="34" charset="-122"/>
+                <a:cs typeface="Calibri" pitchFamily="34" charset="-120"/>
+              </a:rPr>
+              <a:t>DA COMPRENDERE PIÙ AVANTI</a:t>
+            </a:r>
+            <a:endParaRPr lang="en-US" sz="1100" dirty="0"/>
+          </a:p>
+        </p:txBody>
+      </p:sp>
+      <p:sp>
+        <p:nvSpPr>
+          <p:cNvPr id="20" name="Shape 16"/>
+          <p:cNvSpPr/>
+          <p:nvPr/>
+        </p:nvSpPr>
+        <p:spPr>
+          <a:xfrm>
+            <a:off x="6675069" y="91440"/>
+            <a:ext cx="2125980" cy="274320"/>
+          </a:xfrm>
+          <a:prstGeom prst="rect">
+            <a:avLst/>
+          </a:prstGeom>
+          <a:solidFill>
+            <a:srgbClr val="FEF3C7"/>
+          </a:solidFill>
+          <a:ln w="12700">
+            <a:solidFill>
+              <a:srgbClr val="B45309"/>
+            </a:solidFill>
+            <a:prstDash val="solid"/>
+          </a:ln>
+        </p:spPr>
+      </p:sp>
+      <p:sp>
+        <p:nvSpPr>
+          <p:cNvPr id="21" name="Shape 17"/>
+          <p:cNvSpPr/>
+          <p:nvPr/>
+        </p:nvSpPr>
+        <p:spPr>
+          <a:xfrm>
+            <a:off x="6675069" y="91440"/>
+            <a:ext cx="27432" cy="274320"/>
+          </a:xfrm>
+          <a:prstGeom prst="rect">
+            <a:avLst/>
+          </a:prstGeom>
+          <a:solidFill>
+            <a:srgbClr val="B45309"/>
+          </a:solidFill>
+          <a:ln w="12700">
+            <a:solidFill>
+              <a:srgbClr val="B45309"/>
+            </a:solidFill>
+            <a:prstDash val="solid"/>
+          </a:ln>
+        </p:spPr>
+      </p:sp>
+      <p:sp>
+        <p:nvSpPr>
+          <p:cNvPr id="22" name="Shape 18"/>
+          <p:cNvSpPr/>
+          <p:nvPr/>
+        </p:nvSpPr>
+        <p:spPr>
+          <a:xfrm>
+            <a:off x="6729933" y="91440"/>
+            <a:ext cx="27432" cy="274320"/>
+          </a:xfrm>
+          <a:prstGeom prst="rect">
+            <a:avLst/>
+          </a:prstGeom>
+          <a:solidFill>
+            <a:srgbClr val="B45309"/>
+          </a:solidFill>
+          <a:ln w="12700">
+            <a:solidFill>
+              <a:srgbClr val="B45309"/>
+            </a:solidFill>
+            <a:prstDash val="solid"/>
+          </a:ln>
+        </p:spPr>
+      </p:sp>
+      <p:pic>
+        <p:nvPicPr>
+          <p:cNvPr id="23" name="Image 2" descr="preencoded.png">    </p:cNvPr>
+          <p:cNvPicPr>
+            <a:picLocks noChangeAspect="1"/>
+          </p:cNvPicPr>
+          <p:nvPr/>
+        </p:nvPicPr>
+        <p:blipFill>
+          <a:blip r:embed="rId3"/>
+          <a:stretch>
+            <a:fillRect/>
+          </a:stretch>
+        </p:blipFill>
+        <p:spPr>
+          <a:xfrm>
+            <a:off x="6803085" y="128016"/>
+            <a:ext cx="201168" cy="201168"/>
+          </a:xfrm>
+          <a:prstGeom prst="rect">
+            <a:avLst/>
+          </a:prstGeom>
+        </p:spPr>
+      </p:pic>
+      <p:sp>
+        <p:nvSpPr>
+          <p:cNvPr id="24" name="Text 19"/>
+          <p:cNvSpPr txBox="1"/>
+          <p:nvPr/>
+        </p:nvSpPr>
+        <p:spPr>
+          <a:xfrm>
+            <a:off x="7059117" y="91440"/>
+            <a:ext cx="1705356" cy="274320"/>
+          </a:xfrm>
+          <a:prstGeom prst="rect">
+            <a:avLst/>
+          </a:prstGeom>
+          <a:noFill/>
+          <a:ln/>
+        </p:spPr>
+        <p:txBody>
+          <a:bodyPr wrap="square" lIns="0" tIns="0" rIns="0" bIns="0" rtlCol="0" anchor="ctr"/>
+          <a:lstStyle/>
+          <a:p>
+            <a:pPr indent="0" marL="0">
+              <a:buNone/>
+            </a:pPr>
+            <a:r>
+              <a:rPr lang="en-US" sz="1100" b="1" dirty="0">
+                <a:solidFill>
+                  <a:srgbClr val="92400E"/>
+                </a:solidFill>
+                <a:latin typeface="Calibri" pitchFamily="34" charset="0"/>
+                <a:ea typeface="Calibri" pitchFamily="34" charset="-122"/>
+                <a:cs typeface="Calibri" pitchFamily="34" charset="-120"/>
+              </a:rPr>
+              <a:t>DA UTILIZZARE OGGI</a:t>
+            </a:r>
+            <a:endParaRPr lang="en-US" sz="1100" dirty="0"/>
+          </a:p>
+        </p:txBody>
+      </p:sp>
+      <p:sp>
+        <p:nvSpPr>
+          <p:cNvPr id="25" name="Shape 20"/>
+          <p:cNvSpPr/>
+          <p:nvPr/>
+        </p:nvSpPr>
+        <p:spPr>
+          <a:xfrm>
+            <a:off x="4352747" y="91440"/>
+            <a:ext cx="2212594" cy="274320"/>
+          </a:xfrm>
+          <a:prstGeom prst="rect">
+            <a:avLst/>
+          </a:prstGeom>
+          <a:solidFill>
+            <a:srgbClr val="E0F2FE"/>
+          </a:solidFill>
+          <a:ln w="12700">
+            <a:solidFill>
+              <a:srgbClr val="0369A1"/>
+            </a:solidFill>
+            <a:prstDash val="solid"/>
+          </a:ln>
+        </p:spPr>
+      </p:sp>
+      <p:sp>
+        <p:nvSpPr>
+          <p:cNvPr id="26" name="Shape 21"/>
+          <p:cNvSpPr/>
+          <p:nvPr/>
+        </p:nvSpPr>
+        <p:spPr>
+          <a:xfrm>
+            <a:off x="4352747" y="91440"/>
+            <a:ext cx="73152" cy="274320"/>
+          </a:xfrm>
+          <a:prstGeom prst="rect">
+            <a:avLst/>
+          </a:prstGeom>
+          <a:solidFill>
+            <a:srgbClr val="0369A1"/>
+          </a:solidFill>
+          <a:ln w="12700">
+            <a:solidFill>
+              <a:srgbClr val="0369A1"/>
+            </a:solidFill>
+            <a:prstDash val="solid"/>
+          </a:ln>
+        </p:spPr>
+      </p:sp>
+      <p:pic>
+        <p:nvPicPr>
+          <p:cNvPr id="27" name="Image 3" descr="preencoded.png">    </p:cNvPr>
+          <p:cNvPicPr>
+            <a:picLocks noChangeAspect="1"/>
+          </p:cNvPicPr>
+          <p:nvPr/>
+        </p:nvPicPr>
+        <p:blipFill>
+          <a:blip r:embed="rId4"/>
+          <a:stretch>
+            <a:fillRect/>
+          </a:stretch>
+        </p:blipFill>
+        <p:spPr>
+          <a:xfrm>
+            <a:off x="4480763" y="128016"/>
+            <a:ext cx="201168" cy="201168"/>
+          </a:xfrm>
+          <a:prstGeom prst="rect">
+            <a:avLst/>
+          </a:prstGeom>
+        </p:spPr>
+      </p:pic>
+      <p:sp>
+        <p:nvSpPr>
+          <p:cNvPr id="28" name="Text 22"/>
+          <p:cNvSpPr txBox="1"/>
+          <p:nvPr/>
+        </p:nvSpPr>
+        <p:spPr>
+          <a:xfrm>
+            <a:off x="4736795" y="91440"/>
+            <a:ext cx="1791970" cy="274320"/>
+          </a:xfrm>
+          <a:prstGeom prst="rect">
+            <a:avLst/>
+          </a:prstGeom>
+          <a:noFill/>
+          <a:ln/>
+        </p:spPr>
+        <p:txBody>
+          <a:bodyPr wrap="square" lIns="0" tIns="0" rIns="0" bIns="0" rtlCol="0" anchor="ctr"/>
+          <a:lstStyle/>
+          <a:p>
+            <a:pPr indent="0" marL="0">
+              <a:buNone/>
+            </a:pPr>
+            <a:r>
+              <a:rPr lang="en-US" sz="1100" b="1" dirty="0">
+                <a:solidFill>
+                  <a:srgbClr val="075985"/>
+                </a:solidFill>
+                <a:latin typeface="Calibri" pitchFamily="34" charset="0"/>
+                <a:ea typeface="Calibri" pitchFamily="34" charset="-122"/>
+                <a:cs typeface="Calibri" pitchFamily="34" charset="-120"/>
+              </a:rPr>
+              <a:t>DA COMPRENDERE OGGI</a:t>
+            </a:r>
+            <a:endParaRPr lang="en-US" sz="1100" dirty="0"/>
+          </a:p>
+        </p:txBody>
+      </p:sp>
+      <p:sp>
+        <p:nvSpPr>
           <p:cNvPr id="25" name="Slide Number Placeholder 0"/>
           <p:cNvSpPr>
             <a:spLocks noGrp="1"/>
@@ -3366,6 +3794,158 @@
       </p:sp>
       <p:sp>
         <p:nvSpPr>
+          <p:cNvPr id="5" name="Shape 3"/>
+          <p:cNvSpPr/>
+          <p:nvPr/>
+        </p:nvSpPr>
+        <p:spPr>
+          <a:xfrm>
+            <a:off x="7941259" y="91440"/>
+            <a:ext cx="3701796" cy="274320"/>
+          </a:xfrm>
+          <a:prstGeom prst="rect">
+            <a:avLst/>
+          </a:prstGeom>
+          <a:solidFill>
+            <a:srgbClr val="FEF3C7"/>
+          </a:solidFill>
+          <a:ln w="12700">
+            <a:solidFill>
+              <a:srgbClr val="B45309"/>
+            </a:solidFill>
+            <a:prstDash val="solid"/>
+          </a:ln>
+        </p:spPr>
+      </p:sp>
+      <p:sp>
+        <p:nvSpPr>
+          <p:cNvPr id="6" name="Shape 4"/>
+          <p:cNvSpPr/>
+          <p:nvPr/>
+        </p:nvSpPr>
+        <p:spPr>
+          <a:xfrm>
+            <a:off x="7941259" y="91440"/>
+            <a:ext cx="27432" cy="274320"/>
+          </a:xfrm>
+          <a:prstGeom prst="rect">
+            <a:avLst/>
+          </a:prstGeom>
+          <a:solidFill>
+            <a:srgbClr val="B45309"/>
+          </a:solidFill>
+          <a:ln w="12700">
+            <a:solidFill>
+              <a:srgbClr val="B45309"/>
+            </a:solidFill>
+            <a:prstDash val="solid"/>
+          </a:ln>
+        </p:spPr>
+      </p:sp>
+      <p:sp>
+        <p:nvSpPr>
+          <p:cNvPr id="7" name="Shape 5"/>
+          <p:cNvSpPr/>
+          <p:nvPr/>
+        </p:nvSpPr>
+        <p:spPr>
+          <a:xfrm>
+            <a:off x="7996123" y="91440"/>
+            <a:ext cx="27432" cy="274320"/>
+          </a:xfrm>
+          <a:prstGeom prst="rect">
+            <a:avLst/>
+          </a:prstGeom>
+          <a:solidFill>
+            <a:srgbClr val="B45309"/>
+          </a:solidFill>
+          <a:ln w="12700">
+            <a:solidFill>
+              <a:srgbClr val="B45309"/>
+            </a:solidFill>
+            <a:prstDash val="solid"/>
+          </a:ln>
+        </p:spPr>
+      </p:sp>
+      <p:pic>
+        <p:nvPicPr>
+          <p:cNvPr id="8" name="Image 0" descr="preencoded.png">    </p:cNvPr>
+          <p:cNvPicPr>
+            <a:picLocks noChangeAspect="1"/>
+          </p:cNvPicPr>
+          <p:nvPr/>
+        </p:nvPicPr>
+        <p:blipFill>
+          <a:blip r:embed="rId1"/>
+          <a:stretch>
+            <a:fillRect/>
+          </a:stretch>
+        </p:blipFill>
+        <p:spPr>
+          <a:xfrm>
+            <a:off x="8069275" y="128016"/>
+            <a:ext cx="201168" cy="201168"/>
+          </a:xfrm>
+          <a:prstGeom prst="rect">
+            <a:avLst/>
+          </a:prstGeom>
+        </p:spPr>
+      </p:pic>
+      <p:sp>
+        <p:nvSpPr>
+          <p:cNvPr id="9" name="Text 6"/>
+          <p:cNvSpPr txBox="1"/>
+          <p:nvPr/>
+        </p:nvSpPr>
+        <p:spPr>
+          <a:xfrm>
+            <a:off x="8325307" y="91440"/>
+            <a:ext cx="3281172" cy="274320"/>
+          </a:xfrm>
+          <a:prstGeom prst="rect">
+            <a:avLst/>
+          </a:prstGeom>
+          <a:noFill/>
+          <a:ln/>
+        </p:spPr>
+        <p:txBody>
+          <a:bodyPr wrap="square" lIns="0" tIns="0" rIns="0" bIns="0" rtlCol="0" anchor="ctr"/>
+          <a:lstStyle/>
+          <a:p>
+            <a:pPr indent="0" marL="0">
+              <a:buNone/>
+            </a:pPr>
+            <a:r>
+              <a:rPr lang="en-US" sz="1100" b="1" dirty="0">
+                <a:solidFill>
+                  <a:srgbClr val="92400E"/>
+                </a:solidFill>
+                <a:latin typeface="Calibri" pitchFamily="34" charset="0"/>
+                <a:ea typeface="Calibri" pitchFamily="34" charset="-122"/>
+                <a:cs typeface="Calibri" pitchFamily="34" charset="-120"/>
+              </a:rPr>
+              <a:t>DA UTILIZZARE OGGI</a:t>
+            </a:r>
+            <a:pPr indent="0" marL="0">
+              <a:buNone/>
+            </a:pPr>
+            <a:r>
+              <a:rPr lang="en-US" sz="1100" dirty="0">
+                <a:solidFill>
+                  <a:srgbClr val="92400E"/>
+                </a:solidFill>
+                <a:latin typeface="Calibri" pitchFamily="34" charset="0"/>
+                <a:ea typeface="Calibri" pitchFamily="34" charset="-122"/>
+                <a:cs typeface="Calibri" pitchFamily="34" charset="-120"/>
+              </a:rPr>
+              <a:t> · il programma completo</a:t>
+            </a:r>
+            <a:endParaRPr lang="en-US" sz="1100" dirty="0"/>
+          </a:p>
+        </p:txBody>
+      </p:sp>
+      <p:sp>
+        <p:nvSpPr>
           <p:cNvPr id="25" name="Slide Number Placeholder 0"/>
           <p:cNvSpPr>
             <a:spLocks noGrp="1"/>
@@ -4519,6 +5099,158 @@
       </p:sp>
       <p:sp>
         <p:nvSpPr>
+          <p:cNvPr id="17" name="Shape 15"/>
+          <p:cNvSpPr/>
+          <p:nvPr/>
+        </p:nvSpPr>
+        <p:spPr>
+          <a:xfrm>
+            <a:off x="7875600" y="91440"/>
+            <a:ext cx="3767455" cy="274320"/>
+          </a:xfrm>
+          <a:prstGeom prst="rect">
+            <a:avLst/>
+          </a:prstGeom>
+          <a:solidFill>
+            <a:srgbClr val="FEF3C7"/>
+          </a:solidFill>
+          <a:ln w="12700">
+            <a:solidFill>
+              <a:srgbClr val="B45309"/>
+            </a:solidFill>
+            <a:prstDash val="solid"/>
+          </a:ln>
+        </p:spPr>
+      </p:sp>
+      <p:sp>
+        <p:nvSpPr>
+          <p:cNvPr id="18" name="Shape 16"/>
+          <p:cNvSpPr/>
+          <p:nvPr/>
+        </p:nvSpPr>
+        <p:spPr>
+          <a:xfrm>
+            <a:off x="7875600" y="91440"/>
+            <a:ext cx="27432" cy="274320"/>
+          </a:xfrm>
+          <a:prstGeom prst="rect">
+            <a:avLst/>
+          </a:prstGeom>
+          <a:solidFill>
+            <a:srgbClr val="B45309"/>
+          </a:solidFill>
+          <a:ln w="12700">
+            <a:solidFill>
+              <a:srgbClr val="B45309"/>
+            </a:solidFill>
+            <a:prstDash val="solid"/>
+          </a:ln>
+        </p:spPr>
+      </p:sp>
+      <p:sp>
+        <p:nvSpPr>
+          <p:cNvPr id="19" name="Shape 17"/>
+          <p:cNvSpPr/>
+          <p:nvPr/>
+        </p:nvSpPr>
+        <p:spPr>
+          <a:xfrm>
+            <a:off x="7930464" y="91440"/>
+            <a:ext cx="27432" cy="274320"/>
+          </a:xfrm>
+          <a:prstGeom prst="rect">
+            <a:avLst/>
+          </a:prstGeom>
+          <a:solidFill>
+            <a:srgbClr val="B45309"/>
+          </a:solidFill>
+          <a:ln w="12700">
+            <a:solidFill>
+              <a:srgbClr val="B45309"/>
+            </a:solidFill>
+            <a:prstDash val="solid"/>
+          </a:ln>
+        </p:spPr>
+      </p:sp>
+      <p:pic>
+        <p:nvPicPr>
+          <p:cNvPr id="20" name="Image 0" descr="preencoded.png">    </p:cNvPr>
+          <p:cNvPicPr>
+            <a:picLocks noChangeAspect="1"/>
+          </p:cNvPicPr>
+          <p:nvPr/>
+        </p:nvPicPr>
+        <p:blipFill>
+          <a:blip r:embed="rId1"/>
+          <a:stretch>
+            <a:fillRect/>
+          </a:stretch>
+        </p:blipFill>
+        <p:spPr>
+          <a:xfrm>
+            <a:off x="8003616" y="128016"/>
+            <a:ext cx="201168" cy="201168"/>
+          </a:xfrm>
+          <a:prstGeom prst="rect">
+            <a:avLst/>
+          </a:prstGeom>
+        </p:spPr>
+      </p:pic>
+      <p:sp>
+        <p:nvSpPr>
+          <p:cNvPr id="21" name="Text 18"/>
+          <p:cNvSpPr txBox="1"/>
+          <p:nvPr/>
+        </p:nvSpPr>
+        <p:spPr>
+          <a:xfrm>
+            <a:off x="8259648" y="91440"/>
+            <a:ext cx="3346831" cy="274320"/>
+          </a:xfrm>
+          <a:prstGeom prst="rect">
+            <a:avLst/>
+          </a:prstGeom>
+          <a:noFill/>
+          <a:ln/>
+        </p:spPr>
+        <p:txBody>
+          <a:bodyPr wrap="square" lIns="0" tIns="0" rIns="0" bIns="0" rtlCol="0" anchor="ctr"/>
+          <a:lstStyle/>
+          <a:p>
+            <a:pPr indent="0" marL="0">
+              <a:buNone/>
+            </a:pPr>
+            <a:r>
+              <a:rPr lang="en-US" sz="1100" b="1" dirty="0">
+                <a:solidFill>
+                  <a:srgbClr val="92400E"/>
+                </a:solidFill>
+                <a:latin typeface="Calibri" pitchFamily="34" charset="0"/>
+                <a:ea typeface="Calibri" pitchFamily="34" charset="-122"/>
+                <a:cs typeface="Calibri" pitchFamily="34" charset="-120"/>
+              </a:rPr>
+              <a:t>DA UTILIZZARE OGGI</a:t>
+            </a:r>
+            <a:pPr indent="0" marL="0">
+              <a:buNone/>
+            </a:pPr>
+            <a:r>
+              <a:rPr lang="en-US" sz="1100" dirty="0">
+                <a:solidFill>
+                  <a:srgbClr val="92400E"/>
+                </a:solidFill>
+                <a:latin typeface="Calibri" pitchFamily="34" charset="0"/>
+                <a:ea typeface="Calibri" pitchFamily="34" charset="-122"/>
+                <a:cs typeface="Calibri" pitchFamily="34" charset="-120"/>
+              </a:rPr>
+              <a:t> · gli strumenti di PRG32</a:t>
+            </a:r>
+            <a:endParaRPr lang="en-US" sz="1100" dirty="0"/>
+          </a:p>
+        </p:txBody>
+      </p:sp>
+      <p:sp>
+        <p:nvSpPr>
           <p:cNvPr id="25" name="Slide Number Placeholder 0"/>
           <p:cNvSpPr>
             <a:spLocks noGrp="1"/>
@@ -5355,6 +6087,158 @@
       </p:sp>
       <p:sp>
         <p:nvSpPr>
+          <p:cNvPr id="17" name="Shape 15"/>
+          <p:cNvSpPr/>
+          <p:nvPr/>
+        </p:nvSpPr>
+        <p:spPr>
+          <a:xfrm>
+            <a:off x="7875600" y="91440"/>
+            <a:ext cx="3767455" cy="274320"/>
+          </a:xfrm>
+          <a:prstGeom prst="rect">
+            <a:avLst/>
+          </a:prstGeom>
+          <a:solidFill>
+            <a:srgbClr val="FEF3C7"/>
+          </a:solidFill>
+          <a:ln w="12700">
+            <a:solidFill>
+              <a:srgbClr val="B45309"/>
+            </a:solidFill>
+            <a:prstDash val="solid"/>
+          </a:ln>
+        </p:spPr>
+      </p:sp>
+      <p:sp>
+        <p:nvSpPr>
+          <p:cNvPr id="18" name="Shape 16"/>
+          <p:cNvSpPr/>
+          <p:nvPr/>
+        </p:nvSpPr>
+        <p:spPr>
+          <a:xfrm>
+            <a:off x="7875600" y="91440"/>
+            <a:ext cx="27432" cy="274320"/>
+          </a:xfrm>
+          <a:prstGeom prst="rect">
+            <a:avLst/>
+          </a:prstGeom>
+          <a:solidFill>
+            <a:srgbClr val="B45309"/>
+          </a:solidFill>
+          <a:ln w="12700">
+            <a:solidFill>
+              <a:srgbClr val="B45309"/>
+            </a:solidFill>
+            <a:prstDash val="solid"/>
+          </a:ln>
+        </p:spPr>
+      </p:sp>
+      <p:sp>
+        <p:nvSpPr>
+          <p:cNvPr id="19" name="Shape 17"/>
+          <p:cNvSpPr/>
+          <p:nvPr/>
+        </p:nvSpPr>
+        <p:spPr>
+          <a:xfrm>
+            <a:off x="7930464" y="91440"/>
+            <a:ext cx="27432" cy="274320"/>
+          </a:xfrm>
+          <a:prstGeom prst="rect">
+            <a:avLst/>
+          </a:prstGeom>
+          <a:solidFill>
+            <a:srgbClr val="B45309"/>
+          </a:solidFill>
+          <a:ln w="12700">
+            <a:solidFill>
+              <a:srgbClr val="B45309"/>
+            </a:solidFill>
+            <a:prstDash val="solid"/>
+          </a:ln>
+        </p:spPr>
+      </p:sp>
+      <p:pic>
+        <p:nvPicPr>
+          <p:cNvPr id="20" name="Image 0" descr="preencoded.png">    </p:cNvPr>
+          <p:cNvPicPr>
+            <a:picLocks noChangeAspect="1"/>
+          </p:cNvPicPr>
+          <p:nvPr/>
+        </p:nvPicPr>
+        <p:blipFill>
+          <a:blip r:embed="rId1"/>
+          <a:stretch>
+            <a:fillRect/>
+          </a:stretch>
+        </p:blipFill>
+        <p:spPr>
+          <a:xfrm>
+            <a:off x="8003616" y="128016"/>
+            <a:ext cx="201168" cy="201168"/>
+          </a:xfrm>
+          <a:prstGeom prst="rect">
+            <a:avLst/>
+          </a:prstGeom>
+        </p:spPr>
+      </p:pic>
+      <p:sp>
+        <p:nvSpPr>
+          <p:cNvPr id="21" name="Text 18"/>
+          <p:cNvSpPr txBox="1"/>
+          <p:nvPr/>
+        </p:nvSpPr>
+        <p:spPr>
+          <a:xfrm>
+            <a:off x="8259648" y="91440"/>
+            <a:ext cx="3346831" cy="274320"/>
+          </a:xfrm>
+          <a:prstGeom prst="rect">
+            <a:avLst/>
+          </a:prstGeom>
+          <a:noFill/>
+          <a:ln/>
+        </p:spPr>
+        <p:txBody>
+          <a:bodyPr wrap="square" lIns="0" tIns="0" rIns="0" bIns="0" rtlCol="0" anchor="ctr"/>
+          <a:lstStyle/>
+          <a:p>
+            <a:pPr indent="0" marL="0">
+              <a:buNone/>
+            </a:pPr>
+            <a:r>
+              <a:rPr lang="en-US" sz="1100" b="1" dirty="0">
+                <a:solidFill>
+                  <a:srgbClr val="92400E"/>
+                </a:solidFill>
+                <a:latin typeface="Calibri" pitchFamily="34" charset="0"/>
+                <a:ea typeface="Calibri" pitchFamily="34" charset="-122"/>
+                <a:cs typeface="Calibri" pitchFamily="34" charset="-120"/>
+              </a:rPr>
+              <a:t>DA UTILIZZARE OGGI</a:t>
+            </a:r>
+            <a:pPr indent="0" marL="0">
+              <a:buNone/>
+            </a:pPr>
+            <a:r>
+              <a:rPr lang="en-US" sz="1100" dirty="0">
+                <a:solidFill>
+                  <a:srgbClr val="92400E"/>
+                </a:solidFill>
+                <a:latin typeface="Calibri" pitchFamily="34" charset="0"/>
+                <a:ea typeface="Calibri" pitchFamily="34" charset="-122"/>
+                <a:cs typeface="Calibri" pitchFamily="34" charset="-120"/>
+              </a:rPr>
+              <a:t> · gli strumenti di PRG32</a:t>
+            </a:r>
+            <a:endParaRPr lang="en-US" sz="1100" dirty="0"/>
+          </a:p>
+        </p:txBody>
+      </p:sp>
+      <p:sp>
+        <p:nvSpPr>
           <p:cNvPr id="25" name="Slide Number Placeholder 0"/>
           <p:cNvSpPr>
             <a:spLocks noGrp="1"/>
@@ -6184,6 +7068,158 @@
                 <a:cs typeface="Calibri" pitchFamily="34" charset="-120"/>
               </a:rPr>
               <a:t>Schermo nero: confrontate il cablaggio del display con il firmware</a:t>
+            </a:r>
+            <a:endParaRPr lang="en-US" sz="1100" dirty="0"/>
+          </a:p>
+        </p:txBody>
+      </p:sp>
+      <p:sp>
+        <p:nvSpPr>
+          <p:cNvPr id="17" name="Shape 15"/>
+          <p:cNvSpPr/>
+          <p:nvPr/>
+        </p:nvSpPr>
+        <p:spPr>
+          <a:xfrm>
+            <a:off x="7875600" y="91440"/>
+            <a:ext cx="3767455" cy="274320"/>
+          </a:xfrm>
+          <a:prstGeom prst="rect">
+            <a:avLst/>
+          </a:prstGeom>
+          <a:solidFill>
+            <a:srgbClr val="FEF3C7"/>
+          </a:solidFill>
+          <a:ln w="12700">
+            <a:solidFill>
+              <a:srgbClr val="B45309"/>
+            </a:solidFill>
+            <a:prstDash val="solid"/>
+          </a:ln>
+        </p:spPr>
+      </p:sp>
+      <p:sp>
+        <p:nvSpPr>
+          <p:cNvPr id="18" name="Shape 16"/>
+          <p:cNvSpPr/>
+          <p:nvPr/>
+        </p:nvSpPr>
+        <p:spPr>
+          <a:xfrm>
+            <a:off x="7875600" y="91440"/>
+            <a:ext cx="27432" cy="274320"/>
+          </a:xfrm>
+          <a:prstGeom prst="rect">
+            <a:avLst/>
+          </a:prstGeom>
+          <a:solidFill>
+            <a:srgbClr val="B45309"/>
+          </a:solidFill>
+          <a:ln w="12700">
+            <a:solidFill>
+              <a:srgbClr val="B45309"/>
+            </a:solidFill>
+            <a:prstDash val="solid"/>
+          </a:ln>
+        </p:spPr>
+      </p:sp>
+      <p:sp>
+        <p:nvSpPr>
+          <p:cNvPr id="19" name="Shape 17"/>
+          <p:cNvSpPr/>
+          <p:nvPr/>
+        </p:nvSpPr>
+        <p:spPr>
+          <a:xfrm>
+            <a:off x="7930464" y="91440"/>
+            <a:ext cx="27432" cy="274320"/>
+          </a:xfrm>
+          <a:prstGeom prst="rect">
+            <a:avLst/>
+          </a:prstGeom>
+          <a:solidFill>
+            <a:srgbClr val="B45309"/>
+          </a:solidFill>
+          <a:ln w="12700">
+            <a:solidFill>
+              <a:srgbClr val="B45309"/>
+            </a:solidFill>
+            <a:prstDash val="solid"/>
+          </a:ln>
+        </p:spPr>
+      </p:sp>
+      <p:pic>
+        <p:nvPicPr>
+          <p:cNvPr id="20" name="Image 0" descr="preencoded.png">    </p:cNvPr>
+          <p:cNvPicPr>
+            <a:picLocks noChangeAspect="1"/>
+          </p:cNvPicPr>
+          <p:nvPr/>
+        </p:nvPicPr>
+        <p:blipFill>
+          <a:blip r:embed="rId1"/>
+          <a:stretch>
+            <a:fillRect/>
+          </a:stretch>
+        </p:blipFill>
+        <p:spPr>
+          <a:xfrm>
+            <a:off x="8003616" y="128016"/>
+            <a:ext cx="201168" cy="201168"/>
+          </a:xfrm>
+          <a:prstGeom prst="rect">
+            <a:avLst/>
+          </a:prstGeom>
+        </p:spPr>
+      </p:pic>
+      <p:sp>
+        <p:nvSpPr>
+          <p:cNvPr id="21" name="Text 18"/>
+          <p:cNvSpPr txBox="1"/>
+          <p:nvPr/>
+        </p:nvSpPr>
+        <p:spPr>
+          <a:xfrm>
+            <a:off x="8259648" y="91440"/>
+            <a:ext cx="3346831" cy="274320"/>
+          </a:xfrm>
+          <a:prstGeom prst="rect">
+            <a:avLst/>
+          </a:prstGeom>
+          <a:noFill/>
+          <a:ln/>
+        </p:spPr>
+        <p:txBody>
+          <a:bodyPr wrap="square" lIns="0" tIns="0" rIns="0" bIns="0" rtlCol="0" anchor="ctr"/>
+          <a:lstStyle/>
+          <a:p>
+            <a:pPr indent="0" marL="0">
+              <a:buNone/>
+            </a:pPr>
+            <a:r>
+              <a:rPr lang="en-US" sz="1100" b="1" dirty="0">
+                <a:solidFill>
+                  <a:srgbClr val="92400E"/>
+                </a:solidFill>
+                <a:latin typeface="Calibri" pitchFamily="34" charset="0"/>
+                <a:ea typeface="Calibri" pitchFamily="34" charset="-122"/>
+                <a:cs typeface="Calibri" pitchFamily="34" charset="-120"/>
+              </a:rPr>
+              <a:t>DA UTILIZZARE OGGI</a:t>
+            </a:r>
+            <a:pPr indent="0" marL="0">
+              <a:buNone/>
+            </a:pPr>
+            <a:r>
+              <a:rPr lang="en-US" sz="1100" dirty="0">
+                <a:solidFill>
+                  <a:srgbClr val="92400E"/>
+                </a:solidFill>
+                <a:latin typeface="Calibri" pitchFamily="34" charset="0"/>
+                <a:ea typeface="Calibri" pitchFamily="34" charset="-122"/>
+                <a:cs typeface="Calibri" pitchFamily="34" charset="-120"/>
+              </a:rPr>
+              <a:t> · gli strumenti di PRG32</a:t>
             </a:r>
             <a:endParaRPr lang="en-US" sz="1100" dirty="0"/>
           </a:p>
@@ -7572,6 +8608,158 @@
       </p:graphicFrame>
       <p:sp>
         <p:nvSpPr>
+          <p:cNvPr id="4" name="Shape 1"/>
+          <p:cNvSpPr/>
+          <p:nvPr/>
+        </p:nvSpPr>
+        <p:spPr>
+          <a:xfrm>
+            <a:off x="7875600" y="91440"/>
+            <a:ext cx="3767455" cy="274320"/>
+          </a:xfrm>
+          <a:prstGeom prst="rect">
+            <a:avLst/>
+          </a:prstGeom>
+          <a:solidFill>
+            <a:srgbClr val="FEF3C7"/>
+          </a:solidFill>
+          <a:ln w="12700">
+            <a:solidFill>
+              <a:srgbClr val="B45309"/>
+            </a:solidFill>
+            <a:prstDash val="solid"/>
+          </a:ln>
+        </p:spPr>
+      </p:sp>
+      <p:sp>
+        <p:nvSpPr>
+          <p:cNvPr id="5" name="Shape 2"/>
+          <p:cNvSpPr/>
+          <p:nvPr/>
+        </p:nvSpPr>
+        <p:spPr>
+          <a:xfrm>
+            <a:off x="7875600" y="91440"/>
+            <a:ext cx="27432" cy="274320"/>
+          </a:xfrm>
+          <a:prstGeom prst="rect">
+            <a:avLst/>
+          </a:prstGeom>
+          <a:solidFill>
+            <a:srgbClr val="B45309"/>
+          </a:solidFill>
+          <a:ln w="12700">
+            <a:solidFill>
+              <a:srgbClr val="B45309"/>
+            </a:solidFill>
+            <a:prstDash val="solid"/>
+          </a:ln>
+        </p:spPr>
+      </p:sp>
+      <p:sp>
+        <p:nvSpPr>
+          <p:cNvPr id="6" name="Shape 3"/>
+          <p:cNvSpPr/>
+          <p:nvPr/>
+        </p:nvSpPr>
+        <p:spPr>
+          <a:xfrm>
+            <a:off x="7930464" y="91440"/>
+            <a:ext cx="27432" cy="274320"/>
+          </a:xfrm>
+          <a:prstGeom prst="rect">
+            <a:avLst/>
+          </a:prstGeom>
+          <a:solidFill>
+            <a:srgbClr val="B45309"/>
+          </a:solidFill>
+          <a:ln w="12700">
+            <a:solidFill>
+              <a:srgbClr val="B45309"/>
+            </a:solidFill>
+            <a:prstDash val="solid"/>
+          </a:ln>
+        </p:spPr>
+      </p:sp>
+      <p:pic>
+        <p:nvPicPr>
+          <p:cNvPr id="7" name="Image 0" descr="preencoded.png">    </p:cNvPr>
+          <p:cNvPicPr>
+            <a:picLocks noChangeAspect="1"/>
+          </p:cNvPicPr>
+          <p:nvPr/>
+        </p:nvPicPr>
+        <p:blipFill>
+          <a:blip r:embed="rId1"/>
+          <a:stretch>
+            <a:fillRect/>
+          </a:stretch>
+        </p:blipFill>
+        <p:spPr>
+          <a:xfrm>
+            <a:off x="8003616" y="128016"/>
+            <a:ext cx="201168" cy="201168"/>
+          </a:xfrm>
+          <a:prstGeom prst="rect">
+            <a:avLst/>
+          </a:prstGeom>
+        </p:spPr>
+      </p:pic>
+      <p:sp>
+        <p:nvSpPr>
+          <p:cNvPr id="8" name="Text 4"/>
+          <p:cNvSpPr txBox="1"/>
+          <p:nvPr/>
+        </p:nvSpPr>
+        <p:spPr>
+          <a:xfrm>
+            <a:off x="8259648" y="91440"/>
+            <a:ext cx="3346831" cy="274320"/>
+          </a:xfrm>
+          <a:prstGeom prst="rect">
+            <a:avLst/>
+          </a:prstGeom>
+          <a:noFill/>
+          <a:ln/>
+        </p:spPr>
+        <p:txBody>
+          <a:bodyPr wrap="square" lIns="0" tIns="0" rIns="0" bIns="0" rtlCol="0" anchor="ctr"/>
+          <a:lstStyle/>
+          <a:p>
+            <a:pPr indent="0" marL="0">
+              <a:buNone/>
+            </a:pPr>
+            <a:r>
+              <a:rPr lang="en-US" sz="1100" b="1" dirty="0">
+                <a:solidFill>
+                  <a:srgbClr val="92400E"/>
+                </a:solidFill>
+                <a:latin typeface="Calibri" pitchFamily="34" charset="0"/>
+                <a:ea typeface="Calibri" pitchFamily="34" charset="-122"/>
+                <a:cs typeface="Calibri" pitchFamily="34" charset="-120"/>
+              </a:rPr>
+              <a:t>DA UTILIZZARE OGGI</a:t>
+            </a:r>
+            <a:pPr indent="0" marL="0">
+              <a:buNone/>
+            </a:pPr>
+            <a:r>
+              <a:rPr lang="en-US" sz="1100" dirty="0">
+                <a:solidFill>
+                  <a:srgbClr val="92400E"/>
+                </a:solidFill>
+                <a:latin typeface="Calibri" pitchFamily="34" charset="0"/>
+                <a:ea typeface="Calibri" pitchFamily="34" charset="-122"/>
+                <a:cs typeface="Calibri" pitchFamily="34" charset="-120"/>
+              </a:rPr>
+              <a:t> · gli strumenti di PRG32</a:t>
+            </a:r>
+            <a:endParaRPr lang="en-US" sz="1100" dirty="0"/>
+          </a:p>
+        </p:txBody>
+      </p:sp>
+      <p:sp>
+        <p:nvSpPr>
           <p:cNvPr id="25" name="Slide Number Placeholder 0"/>
           <p:cNvSpPr>
             <a:spLocks noGrp="1"/>
@@ -9672,6 +10860,133 @@
       </p:sp>
       <p:sp>
         <p:nvSpPr>
+          <p:cNvPr id="17" name="Shape 15"/>
+          <p:cNvSpPr/>
+          <p:nvPr/>
+        </p:nvSpPr>
+        <p:spPr>
+          <a:xfrm>
+            <a:off x="8445576" y="91440"/>
+            <a:ext cx="3197479" cy="274320"/>
+          </a:xfrm>
+          <a:prstGeom prst="rect">
+            <a:avLst/>
+          </a:prstGeom>
+          <a:solidFill>
+            <a:srgbClr val="E0F2FE"/>
+          </a:solidFill>
+          <a:ln w="12700">
+            <a:solidFill>
+              <a:srgbClr val="0369A1"/>
+            </a:solidFill>
+            <a:prstDash val="solid"/>
+          </a:ln>
+        </p:spPr>
+      </p:sp>
+      <p:sp>
+        <p:nvSpPr>
+          <p:cNvPr id="18" name="Shape 16"/>
+          <p:cNvSpPr/>
+          <p:nvPr/>
+        </p:nvSpPr>
+        <p:spPr>
+          <a:xfrm>
+            <a:off x="8445576" y="91440"/>
+            <a:ext cx="73152" cy="274320"/>
+          </a:xfrm>
+          <a:prstGeom prst="rect">
+            <a:avLst/>
+          </a:prstGeom>
+          <a:solidFill>
+            <a:srgbClr val="0369A1"/>
+          </a:solidFill>
+          <a:ln w="12700">
+            <a:solidFill>
+              <a:srgbClr val="0369A1"/>
+            </a:solidFill>
+            <a:prstDash val="solid"/>
+          </a:ln>
+        </p:spPr>
+      </p:sp>
+      <p:pic>
+        <p:nvPicPr>
+          <p:cNvPr id="19" name="Image 0" descr="preencoded.png">    </p:cNvPr>
+          <p:cNvPicPr>
+            <a:picLocks noChangeAspect="1"/>
+          </p:cNvPicPr>
+          <p:nvPr/>
+        </p:nvPicPr>
+        <p:blipFill>
+          <a:blip r:embed="rId1"/>
+          <a:stretch>
+            <a:fillRect/>
+          </a:stretch>
+        </p:blipFill>
+        <p:spPr>
+          <a:xfrm>
+            <a:off x="8573592" y="128016"/>
+            <a:ext cx="201168" cy="201168"/>
+          </a:xfrm>
+          <a:prstGeom prst="rect">
+            <a:avLst/>
+          </a:prstGeom>
+        </p:spPr>
+      </p:pic>
+      <p:sp>
+        <p:nvSpPr>
+          <p:cNvPr id="20" name="Text 17"/>
+          <p:cNvSpPr txBox="1"/>
+          <p:nvPr/>
+        </p:nvSpPr>
+        <p:spPr>
+          <a:xfrm>
+            <a:off x="8829624" y="91440"/>
+            <a:ext cx="2776855" cy="274320"/>
+          </a:xfrm>
+          <a:prstGeom prst="rect">
+            <a:avLst/>
+          </a:prstGeom>
+          <a:noFill/>
+          <a:ln/>
+        </p:spPr>
+        <p:txBody>
+          <a:bodyPr wrap="square" lIns="0" tIns="0" rIns="0" bIns="0" rtlCol="0" anchor="ctr"/>
+          <a:lstStyle/>
+          <a:p>
+            <a:pPr indent="0" marL="0">
+              <a:buNone/>
+            </a:pPr>
+            <a:r>
+              <a:rPr lang="en-US" sz="1100" b="1" dirty="0">
+                <a:solidFill>
+                  <a:srgbClr val="075985"/>
+                </a:solidFill>
+                <a:latin typeface="Calibri" pitchFamily="34" charset="0"/>
+                <a:ea typeface="Calibri" pitchFamily="34" charset="-122"/>
+                <a:cs typeface="Calibri" pitchFamily="34" charset="-120"/>
+              </a:rPr>
+              <a:t>DA COMPRENDERE OGGI</a:t>
+            </a:r>
+            <a:pPr indent="0" marL="0">
+              <a:buNone/>
+            </a:pPr>
+            <a:r>
+              <a:rPr lang="en-US" sz="1100" dirty="0">
+                <a:solidFill>
+                  <a:srgbClr val="075985"/>
+                </a:solidFill>
+                <a:latin typeface="Calibri" pitchFamily="34" charset="0"/>
+                <a:ea typeface="Calibri" pitchFamily="34" charset="-122"/>
+                <a:cs typeface="Calibri" pitchFamily="34" charset="-120"/>
+              </a:rPr>
+              <a:t> · il sommatore</a:t>
+            </a:r>
+            <a:endParaRPr lang="en-US" sz="1100" dirty="0"/>
+          </a:p>
+        </p:txBody>
+      </p:sp>
+      <p:sp>
+        <p:nvSpPr>
           <p:cNvPr id="25" name="Slide Number Placeholder 0"/>
           <p:cNvSpPr>
             <a:spLocks noGrp="1"/>
@@ -10493,6 +11808,133 @@
       </p:sp>
       <p:sp>
         <p:nvSpPr>
+          <p:cNvPr id="17" name="Shape 15"/>
+          <p:cNvSpPr/>
+          <p:nvPr/>
+        </p:nvSpPr>
+        <p:spPr>
+          <a:xfrm>
+            <a:off x="8445576" y="91440"/>
+            <a:ext cx="3197479" cy="274320"/>
+          </a:xfrm>
+          <a:prstGeom prst="rect">
+            <a:avLst/>
+          </a:prstGeom>
+          <a:solidFill>
+            <a:srgbClr val="E0F2FE"/>
+          </a:solidFill>
+          <a:ln w="12700">
+            <a:solidFill>
+              <a:srgbClr val="0369A1"/>
+            </a:solidFill>
+            <a:prstDash val="solid"/>
+          </a:ln>
+        </p:spPr>
+      </p:sp>
+      <p:sp>
+        <p:nvSpPr>
+          <p:cNvPr id="18" name="Shape 16"/>
+          <p:cNvSpPr/>
+          <p:nvPr/>
+        </p:nvSpPr>
+        <p:spPr>
+          <a:xfrm>
+            <a:off x="8445576" y="91440"/>
+            <a:ext cx="73152" cy="274320"/>
+          </a:xfrm>
+          <a:prstGeom prst="rect">
+            <a:avLst/>
+          </a:prstGeom>
+          <a:solidFill>
+            <a:srgbClr val="0369A1"/>
+          </a:solidFill>
+          <a:ln w="12700">
+            <a:solidFill>
+              <a:srgbClr val="0369A1"/>
+            </a:solidFill>
+            <a:prstDash val="solid"/>
+          </a:ln>
+        </p:spPr>
+      </p:sp>
+      <p:pic>
+        <p:nvPicPr>
+          <p:cNvPr id="19" name="Image 0" descr="preencoded.png">    </p:cNvPr>
+          <p:cNvPicPr>
+            <a:picLocks noChangeAspect="1"/>
+          </p:cNvPicPr>
+          <p:nvPr/>
+        </p:nvPicPr>
+        <p:blipFill>
+          <a:blip r:embed="rId1"/>
+          <a:stretch>
+            <a:fillRect/>
+          </a:stretch>
+        </p:blipFill>
+        <p:spPr>
+          <a:xfrm>
+            <a:off x="8573592" y="128016"/>
+            <a:ext cx="201168" cy="201168"/>
+          </a:xfrm>
+          <a:prstGeom prst="rect">
+            <a:avLst/>
+          </a:prstGeom>
+        </p:spPr>
+      </p:pic>
+      <p:sp>
+        <p:nvSpPr>
+          <p:cNvPr id="20" name="Text 17"/>
+          <p:cNvSpPr txBox="1"/>
+          <p:nvPr/>
+        </p:nvSpPr>
+        <p:spPr>
+          <a:xfrm>
+            <a:off x="8829624" y="91440"/>
+            <a:ext cx="2776855" cy="274320"/>
+          </a:xfrm>
+          <a:prstGeom prst="rect">
+            <a:avLst/>
+          </a:prstGeom>
+          <a:noFill/>
+          <a:ln/>
+        </p:spPr>
+        <p:txBody>
+          <a:bodyPr wrap="square" lIns="0" tIns="0" rIns="0" bIns="0" rtlCol="0" anchor="ctr"/>
+          <a:lstStyle/>
+          <a:p>
+            <a:pPr indent="0" marL="0">
+              <a:buNone/>
+            </a:pPr>
+            <a:r>
+              <a:rPr lang="en-US" sz="1100" b="1" dirty="0">
+                <a:solidFill>
+                  <a:srgbClr val="075985"/>
+                </a:solidFill>
+                <a:latin typeface="Calibri" pitchFamily="34" charset="0"/>
+                <a:ea typeface="Calibri" pitchFamily="34" charset="-122"/>
+                <a:cs typeface="Calibri" pitchFamily="34" charset="-120"/>
+              </a:rPr>
+              <a:t>DA COMPRENDERE OGGI</a:t>
+            </a:r>
+            <a:pPr indent="0" marL="0">
+              <a:buNone/>
+            </a:pPr>
+            <a:r>
+              <a:rPr lang="en-US" sz="1100" dirty="0">
+                <a:solidFill>
+                  <a:srgbClr val="075985"/>
+                </a:solidFill>
+                <a:latin typeface="Calibri" pitchFamily="34" charset="0"/>
+                <a:ea typeface="Calibri" pitchFamily="34" charset="-122"/>
+                <a:cs typeface="Calibri" pitchFamily="34" charset="-120"/>
+              </a:rPr>
+              <a:t> · il sommatore</a:t>
+            </a:r>
+            <a:endParaRPr lang="en-US" sz="1100" dirty="0"/>
+          </a:p>
+        </p:txBody>
+      </p:sp>
+      <p:sp>
+        <p:nvSpPr>
           <p:cNvPr id="25" name="Slide Number Placeholder 0"/>
           <p:cNvSpPr>
             <a:spLocks noGrp="1"/>
@@ -11030,6 +12472,158 @@
       </p:sp>
       <p:sp>
         <p:nvSpPr>
+          <p:cNvPr id="5" name="Shape 3"/>
+          <p:cNvSpPr/>
+          <p:nvPr/>
+        </p:nvSpPr>
+        <p:spPr>
+          <a:xfrm>
+            <a:off x="7941259" y="91440"/>
+            <a:ext cx="3701796" cy="274320"/>
+          </a:xfrm>
+          <a:prstGeom prst="rect">
+            <a:avLst/>
+          </a:prstGeom>
+          <a:solidFill>
+            <a:srgbClr val="FEF3C7"/>
+          </a:solidFill>
+          <a:ln w="12700">
+            <a:solidFill>
+              <a:srgbClr val="B45309"/>
+            </a:solidFill>
+            <a:prstDash val="solid"/>
+          </a:ln>
+        </p:spPr>
+      </p:sp>
+      <p:sp>
+        <p:nvSpPr>
+          <p:cNvPr id="6" name="Shape 4"/>
+          <p:cNvSpPr/>
+          <p:nvPr/>
+        </p:nvSpPr>
+        <p:spPr>
+          <a:xfrm>
+            <a:off x="7941259" y="91440"/>
+            <a:ext cx="27432" cy="274320"/>
+          </a:xfrm>
+          <a:prstGeom prst="rect">
+            <a:avLst/>
+          </a:prstGeom>
+          <a:solidFill>
+            <a:srgbClr val="B45309"/>
+          </a:solidFill>
+          <a:ln w="12700">
+            <a:solidFill>
+              <a:srgbClr val="B45309"/>
+            </a:solidFill>
+            <a:prstDash val="solid"/>
+          </a:ln>
+        </p:spPr>
+      </p:sp>
+      <p:sp>
+        <p:nvSpPr>
+          <p:cNvPr id="7" name="Shape 5"/>
+          <p:cNvSpPr/>
+          <p:nvPr/>
+        </p:nvSpPr>
+        <p:spPr>
+          <a:xfrm>
+            <a:off x="7996123" y="91440"/>
+            <a:ext cx="27432" cy="274320"/>
+          </a:xfrm>
+          <a:prstGeom prst="rect">
+            <a:avLst/>
+          </a:prstGeom>
+          <a:solidFill>
+            <a:srgbClr val="B45309"/>
+          </a:solidFill>
+          <a:ln w="12700">
+            <a:solidFill>
+              <a:srgbClr val="B45309"/>
+            </a:solidFill>
+            <a:prstDash val="solid"/>
+          </a:ln>
+        </p:spPr>
+      </p:sp>
+      <p:pic>
+        <p:nvPicPr>
+          <p:cNvPr id="8" name="Image 0" descr="preencoded.png">    </p:cNvPr>
+          <p:cNvPicPr>
+            <a:picLocks noChangeAspect="1"/>
+          </p:cNvPicPr>
+          <p:nvPr/>
+        </p:nvPicPr>
+        <p:blipFill>
+          <a:blip r:embed="rId1"/>
+          <a:stretch>
+            <a:fillRect/>
+          </a:stretch>
+        </p:blipFill>
+        <p:spPr>
+          <a:xfrm>
+            <a:off x="8069275" y="128016"/>
+            <a:ext cx="201168" cy="201168"/>
+          </a:xfrm>
+          <a:prstGeom prst="rect">
+            <a:avLst/>
+          </a:prstGeom>
+        </p:spPr>
+      </p:pic>
+      <p:sp>
+        <p:nvSpPr>
+          <p:cNvPr id="9" name="Text 6"/>
+          <p:cNvSpPr txBox="1"/>
+          <p:nvPr/>
+        </p:nvSpPr>
+        <p:spPr>
+          <a:xfrm>
+            <a:off x="8325307" y="91440"/>
+            <a:ext cx="3281172" cy="274320"/>
+          </a:xfrm>
+          <a:prstGeom prst="rect">
+            <a:avLst/>
+          </a:prstGeom>
+          <a:noFill/>
+          <a:ln/>
+        </p:spPr>
+        <p:txBody>
+          <a:bodyPr wrap="square" lIns="0" tIns="0" rIns="0" bIns="0" rtlCol="0" anchor="ctr"/>
+          <a:lstStyle/>
+          <a:p>
+            <a:pPr indent="0" marL="0">
+              <a:buNone/>
+            </a:pPr>
+            <a:r>
+              <a:rPr lang="en-US" sz="1100" b="1" dirty="0">
+                <a:solidFill>
+                  <a:srgbClr val="92400E"/>
+                </a:solidFill>
+                <a:latin typeface="Calibri" pitchFamily="34" charset="0"/>
+                <a:ea typeface="Calibri" pitchFamily="34" charset="-122"/>
+                <a:cs typeface="Calibri" pitchFamily="34" charset="-120"/>
+              </a:rPr>
+              <a:t>DA UTILIZZARE OGGI</a:t>
+            </a:r>
+            <a:pPr indent="0" marL="0">
+              <a:buNone/>
+            </a:pPr>
+            <a:r>
+              <a:rPr lang="en-US" sz="1100" dirty="0">
+                <a:solidFill>
+                  <a:srgbClr val="92400E"/>
+                </a:solidFill>
+                <a:latin typeface="Calibri" pitchFamily="34" charset="0"/>
+                <a:ea typeface="Calibri" pitchFamily="34" charset="-122"/>
+                <a:cs typeface="Calibri" pitchFamily="34" charset="-120"/>
+              </a:rPr>
+              <a:t> · il programma completo</a:t>
+            </a:r>
+            <a:endParaRPr lang="en-US" sz="1100" dirty="0"/>
+          </a:p>
+        </p:txBody>
+      </p:sp>
+      <p:sp>
+        <p:nvSpPr>
           <p:cNvPr id="25" name="Slide Number Placeholder 0"/>
           <p:cNvSpPr>
             <a:spLocks noGrp="1"/>
@@ -11450,6 +13044,158 @@
       </p:sp>
       <p:sp>
         <p:nvSpPr>
+          <p:cNvPr id="5" name="Shape 3"/>
+          <p:cNvSpPr/>
+          <p:nvPr/>
+        </p:nvSpPr>
+        <p:spPr>
+          <a:xfrm>
+            <a:off x="7941259" y="91440"/>
+            <a:ext cx="3701796" cy="274320"/>
+          </a:xfrm>
+          <a:prstGeom prst="rect">
+            <a:avLst/>
+          </a:prstGeom>
+          <a:solidFill>
+            <a:srgbClr val="FEF3C7"/>
+          </a:solidFill>
+          <a:ln w="12700">
+            <a:solidFill>
+              <a:srgbClr val="B45309"/>
+            </a:solidFill>
+            <a:prstDash val="solid"/>
+          </a:ln>
+        </p:spPr>
+      </p:sp>
+      <p:sp>
+        <p:nvSpPr>
+          <p:cNvPr id="6" name="Shape 4"/>
+          <p:cNvSpPr/>
+          <p:nvPr/>
+        </p:nvSpPr>
+        <p:spPr>
+          <a:xfrm>
+            <a:off x="7941259" y="91440"/>
+            <a:ext cx="27432" cy="274320"/>
+          </a:xfrm>
+          <a:prstGeom prst="rect">
+            <a:avLst/>
+          </a:prstGeom>
+          <a:solidFill>
+            <a:srgbClr val="B45309"/>
+          </a:solidFill>
+          <a:ln w="12700">
+            <a:solidFill>
+              <a:srgbClr val="B45309"/>
+            </a:solidFill>
+            <a:prstDash val="solid"/>
+          </a:ln>
+        </p:spPr>
+      </p:sp>
+      <p:sp>
+        <p:nvSpPr>
+          <p:cNvPr id="7" name="Shape 5"/>
+          <p:cNvSpPr/>
+          <p:nvPr/>
+        </p:nvSpPr>
+        <p:spPr>
+          <a:xfrm>
+            <a:off x="7996123" y="91440"/>
+            <a:ext cx="27432" cy="274320"/>
+          </a:xfrm>
+          <a:prstGeom prst="rect">
+            <a:avLst/>
+          </a:prstGeom>
+          <a:solidFill>
+            <a:srgbClr val="B45309"/>
+          </a:solidFill>
+          <a:ln w="12700">
+            <a:solidFill>
+              <a:srgbClr val="B45309"/>
+            </a:solidFill>
+            <a:prstDash val="solid"/>
+          </a:ln>
+        </p:spPr>
+      </p:sp>
+      <p:pic>
+        <p:nvPicPr>
+          <p:cNvPr id="8" name="Image 0" descr="preencoded.png">    </p:cNvPr>
+          <p:cNvPicPr>
+            <a:picLocks noChangeAspect="1"/>
+          </p:cNvPicPr>
+          <p:nvPr/>
+        </p:nvPicPr>
+        <p:blipFill>
+          <a:blip r:embed="rId1"/>
+          <a:stretch>
+            <a:fillRect/>
+          </a:stretch>
+        </p:blipFill>
+        <p:spPr>
+          <a:xfrm>
+            <a:off x="8069275" y="128016"/>
+            <a:ext cx="201168" cy="201168"/>
+          </a:xfrm>
+          <a:prstGeom prst="rect">
+            <a:avLst/>
+          </a:prstGeom>
+        </p:spPr>
+      </p:pic>
+      <p:sp>
+        <p:nvSpPr>
+          <p:cNvPr id="9" name="Text 6"/>
+          <p:cNvSpPr txBox="1"/>
+          <p:nvPr/>
+        </p:nvSpPr>
+        <p:spPr>
+          <a:xfrm>
+            <a:off x="8325307" y="91440"/>
+            <a:ext cx="3281172" cy="274320"/>
+          </a:xfrm>
+          <a:prstGeom prst="rect">
+            <a:avLst/>
+          </a:prstGeom>
+          <a:noFill/>
+          <a:ln/>
+        </p:spPr>
+        <p:txBody>
+          <a:bodyPr wrap="square" lIns="0" tIns="0" rIns="0" bIns="0" rtlCol="0" anchor="ctr"/>
+          <a:lstStyle/>
+          <a:p>
+            <a:pPr indent="0" marL="0">
+              <a:buNone/>
+            </a:pPr>
+            <a:r>
+              <a:rPr lang="en-US" sz="1100" b="1" dirty="0">
+                <a:solidFill>
+                  <a:srgbClr val="92400E"/>
+                </a:solidFill>
+                <a:latin typeface="Calibri" pitchFamily="34" charset="0"/>
+                <a:ea typeface="Calibri" pitchFamily="34" charset="-122"/>
+                <a:cs typeface="Calibri" pitchFamily="34" charset="-120"/>
+              </a:rPr>
+              <a:t>DA UTILIZZARE OGGI</a:t>
+            </a:r>
+            <a:pPr indent="0" marL="0">
+              <a:buNone/>
+            </a:pPr>
+            <a:r>
+              <a:rPr lang="en-US" sz="1100" dirty="0">
+                <a:solidFill>
+                  <a:srgbClr val="92400E"/>
+                </a:solidFill>
+                <a:latin typeface="Calibri" pitchFamily="34" charset="0"/>
+                <a:ea typeface="Calibri" pitchFamily="34" charset="-122"/>
+                <a:cs typeface="Calibri" pitchFamily="34" charset="-120"/>
+              </a:rPr>
+              <a:t> · il programma completo</a:t>
+            </a:r>
+            <a:endParaRPr lang="en-US" sz="1100" dirty="0"/>
+          </a:p>
+        </p:txBody>
+      </p:sp>
+      <p:sp>
+        <p:nvSpPr>
           <p:cNvPr id="25" name="Slide Number Placeholder 0"/>
           <p:cNvSpPr>
             <a:spLocks noGrp="1"/>
@@ -11955,6 +13701,158 @@
       </p:sp>
       <p:sp>
         <p:nvSpPr>
+          <p:cNvPr id="5" name="Shape 3"/>
+          <p:cNvSpPr/>
+          <p:nvPr/>
+        </p:nvSpPr>
+        <p:spPr>
+          <a:xfrm>
+            <a:off x="7941259" y="91440"/>
+            <a:ext cx="3701796" cy="274320"/>
+          </a:xfrm>
+          <a:prstGeom prst="rect">
+            <a:avLst/>
+          </a:prstGeom>
+          <a:solidFill>
+            <a:srgbClr val="FEF3C7"/>
+          </a:solidFill>
+          <a:ln w="12700">
+            <a:solidFill>
+              <a:srgbClr val="B45309"/>
+            </a:solidFill>
+            <a:prstDash val="solid"/>
+          </a:ln>
+        </p:spPr>
+      </p:sp>
+      <p:sp>
+        <p:nvSpPr>
+          <p:cNvPr id="6" name="Shape 4"/>
+          <p:cNvSpPr/>
+          <p:nvPr/>
+        </p:nvSpPr>
+        <p:spPr>
+          <a:xfrm>
+            <a:off x="7941259" y="91440"/>
+            <a:ext cx="27432" cy="274320"/>
+          </a:xfrm>
+          <a:prstGeom prst="rect">
+            <a:avLst/>
+          </a:prstGeom>
+          <a:solidFill>
+            <a:srgbClr val="B45309"/>
+          </a:solidFill>
+          <a:ln w="12700">
+            <a:solidFill>
+              <a:srgbClr val="B45309"/>
+            </a:solidFill>
+            <a:prstDash val="solid"/>
+          </a:ln>
+        </p:spPr>
+      </p:sp>
+      <p:sp>
+        <p:nvSpPr>
+          <p:cNvPr id="7" name="Shape 5"/>
+          <p:cNvSpPr/>
+          <p:nvPr/>
+        </p:nvSpPr>
+        <p:spPr>
+          <a:xfrm>
+            <a:off x="7996123" y="91440"/>
+            <a:ext cx="27432" cy="274320"/>
+          </a:xfrm>
+          <a:prstGeom prst="rect">
+            <a:avLst/>
+          </a:prstGeom>
+          <a:solidFill>
+            <a:srgbClr val="B45309"/>
+          </a:solidFill>
+          <a:ln w="12700">
+            <a:solidFill>
+              <a:srgbClr val="B45309"/>
+            </a:solidFill>
+            <a:prstDash val="solid"/>
+          </a:ln>
+        </p:spPr>
+      </p:sp>
+      <p:pic>
+        <p:nvPicPr>
+          <p:cNvPr id="8" name="Image 0" descr="preencoded.png">    </p:cNvPr>
+          <p:cNvPicPr>
+            <a:picLocks noChangeAspect="1"/>
+          </p:cNvPicPr>
+          <p:nvPr/>
+        </p:nvPicPr>
+        <p:blipFill>
+          <a:blip r:embed="rId1"/>
+          <a:stretch>
+            <a:fillRect/>
+          </a:stretch>
+        </p:blipFill>
+        <p:spPr>
+          <a:xfrm>
+            <a:off x="8069275" y="128016"/>
+            <a:ext cx="201168" cy="201168"/>
+          </a:xfrm>
+          <a:prstGeom prst="rect">
+            <a:avLst/>
+          </a:prstGeom>
+        </p:spPr>
+      </p:pic>
+      <p:sp>
+        <p:nvSpPr>
+          <p:cNvPr id="9" name="Text 6"/>
+          <p:cNvSpPr txBox="1"/>
+          <p:nvPr/>
+        </p:nvSpPr>
+        <p:spPr>
+          <a:xfrm>
+            <a:off x="8325307" y="91440"/>
+            <a:ext cx="3281172" cy="274320"/>
+          </a:xfrm>
+          <a:prstGeom prst="rect">
+            <a:avLst/>
+          </a:prstGeom>
+          <a:noFill/>
+          <a:ln/>
+        </p:spPr>
+        <p:txBody>
+          <a:bodyPr wrap="square" lIns="0" tIns="0" rIns="0" bIns="0" rtlCol="0" anchor="ctr"/>
+          <a:lstStyle/>
+          <a:p>
+            <a:pPr indent="0" marL="0">
+              <a:buNone/>
+            </a:pPr>
+            <a:r>
+              <a:rPr lang="en-US" sz="1100" b="1" dirty="0">
+                <a:solidFill>
+                  <a:srgbClr val="92400E"/>
+                </a:solidFill>
+                <a:latin typeface="Calibri" pitchFamily="34" charset="0"/>
+                <a:ea typeface="Calibri" pitchFamily="34" charset="-122"/>
+                <a:cs typeface="Calibri" pitchFamily="34" charset="-120"/>
+              </a:rPr>
+              <a:t>DA UTILIZZARE OGGI</a:t>
+            </a:r>
+            <a:pPr indent="0" marL="0">
+              <a:buNone/>
+            </a:pPr>
+            <a:r>
+              <a:rPr lang="en-US" sz="1100" dirty="0">
+                <a:solidFill>
+                  <a:srgbClr val="92400E"/>
+                </a:solidFill>
+                <a:latin typeface="Calibri" pitchFamily="34" charset="0"/>
+                <a:ea typeface="Calibri" pitchFamily="34" charset="-122"/>
+                <a:cs typeface="Calibri" pitchFamily="34" charset="-120"/>
+              </a:rPr>
+              <a:t> · il programma completo</a:t>
+            </a:r>
+            <a:endParaRPr lang="en-US" sz="1100" dirty="0"/>
+          </a:p>
+        </p:txBody>
+      </p:sp>
+      <p:sp>
+        <p:nvSpPr>
           <p:cNvPr id="25" name="Slide Number Placeholder 0"/>
           <p:cNvSpPr>
             <a:spLocks noGrp="1"/>
@@ -12491,6 +14389,158 @@
       </p:sp>
       <p:sp>
         <p:nvSpPr>
+          <p:cNvPr id="5" name="Shape 3"/>
+          <p:cNvSpPr/>
+          <p:nvPr/>
+        </p:nvSpPr>
+        <p:spPr>
+          <a:xfrm>
+            <a:off x="7941259" y="91440"/>
+            <a:ext cx="3701796" cy="274320"/>
+          </a:xfrm>
+          <a:prstGeom prst="rect">
+            <a:avLst/>
+          </a:prstGeom>
+          <a:solidFill>
+            <a:srgbClr val="FEF3C7"/>
+          </a:solidFill>
+          <a:ln w="12700">
+            <a:solidFill>
+              <a:srgbClr val="B45309"/>
+            </a:solidFill>
+            <a:prstDash val="solid"/>
+          </a:ln>
+        </p:spPr>
+      </p:sp>
+      <p:sp>
+        <p:nvSpPr>
+          <p:cNvPr id="6" name="Shape 4"/>
+          <p:cNvSpPr/>
+          <p:nvPr/>
+        </p:nvSpPr>
+        <p:spPr>
+          <a:xfrm>
+            <a:off x="7941259" y="91440"/>
+            <a:ext cx="27432" cy="274320"/>
+          </a:xfrm>
+          <a:prstGeom prst="rect">
+            <a:avLst/>
+          </a:prstGeom>
+          <a:solidFill>
+            <a:srgbClr val="B45309"/>
+          </a:solidFill>
+          <a:ln w="12700">
+            <a:solidFill>
+              <a:srgbClr val="B45309"/>
+            </a:solidFill>
+            <a:prstDash val="solid"/>
+          </a:ln>
+        </p:spPr>
+      </p:sp>
+      <p:sp>
+        <p:nvSpPr>
+          <p:cNvPr id="7" name="Shape 5"/>
+          <p:cNvSpPr/>
+          <p:nvPr/>
+        </p:nvSpPr>
+        <p:spPr>
+          <a:xfrm>
+            <a:off x="7996123" y="91440"/>
+            <a:ext cx="27432" cy="274320"/>
+          </a:xfrm>
+          <a:prstGeom prst="rect">
+            <a:avLst/>
+          </a:prstGeom>
+          <a:solidFill>
+            <a:srgbClr val="B45309"/>
+          </a:solidFill>
+          <a:ln w="12700">
+            <a:solidFill>
+              <a:srgbClr val="B45309"/>
+            </a:solidFill>
+            <a:prstDash val="solid"/>
+          </a:ln>
+        </p:spPr>
+      </p:sp>
+      <p:pic>
+        <p:nvPicPr>
+          <p:cNvPr id="8" name="Image 0" descr="preencoded.png">    </p:cNvPr>
+          <p:cNvPicPr>
+            <a:picLocks noChangeAspect="1"/>
+          </p:cNvPicPr>
+          <p:nvPr/>
+        </p:nvPicPr>
+        <p:blipFill>
+          <a:blip r:embed="rId1"/>
+          <a:stretch>
+            <a:fillRect/>
+          </a:stretch>
+        </p:blipFill>
+        <p:spPr>
+          <a:xfrm>
+            <a:off x="8069275" y="128016"/>
+            <a:ext cx="201168" cy="201168"/>
+          </a:xfrm>
+          <a:prstGeom prst="rect">
+            <a:avLst/>
+          </a:prstGeom>
+        </p:spPr>
+      </p:pic>
+      <p:sp>
+        <p:nvSpPr>
+          <p:cNvPr id="9" name="Text 6"/>
+          <p:cNvSpPr txBox="1"/>
+          <p:nvPr/>
+        </p:nvSpPr>
+        <p:spPr>
+          <a:xfrm>
+            <a:off x="8325307" y="91440"/>
+            <a:ext cx="3281172" cy="274320"/>
+          </a:xfrm>
+          <a:prstGeom prst="rect">
+            <a:avLst/>
+          </a:prstGeom>
+          <a:noFill/>
+          <a:ln/>
+        </p:spPr>
+        <p:txBody>
+          <a:bodyPr wrap="square" lIns="0" tIns="0" rIns="0" bIns="0" rtlCol="0" anchor="ctr"/>
+          <a:lstStyle/>
+          <a:p>
+            <a:pPr indent="0" marL="0">
+              <a:buNone/>
+            </a:pPr>
+            <a:r>
+              <a:rPr lang="en-US" sz="1100" b="1" dirty="0">
+                <a:solidFill>
+                  <a:srgbClr val="92400E"/>
+                </a:solidFill>
+                <a:latin typeface="Calibri" pitchFamily="34" charset="0"/>
+                <a:ea typeface="Calibri" pitchFamily="34" charset="-122"/>
+                <a:cs typeface="Calibri" pitchFamily="34" charset="-120"/>
+              </a:rPr>
+              <a:t>DA UTILIZZARE OGGI</a:t>
+            </a:r>
+            <a:pPr indent="0" marL="0">
+              <a:buNone/>
+            </a:pPr>
+            <a:r>
+              <a:rPr lang="en-US" sz="1100" dirty="0">
+                <a:solidFill>
+                  <a:srgbClr val="92400E"/>
+                </a:solidFill>
+                <a:latin typeface="Calibri" pitchFamily="34" charset="0"/>
+                <a:ea typeface="Calibri" pitchFamily="34" charset="-122"/>
+                <a:cs typeface="Calibri" pitchFamily="34" charset="-120"/>
+              </a:rPr>
+              <a:t> · il programma completo</a:t>
+            </a:r>
+            <a:endParaRPr lang="en-US" sz="1100" dirty="0"/>
+          </a:p>
+        </p:txBody>
+      </p:sp>
+      <p:sp>
+        <p:nvSpPr>
           <p:cNvPr id="25" name="Slide Number Placeholder 0"/>
           <p:cNvSpPr>
             <a:spLocks noGrp="1"/>
@@ -13127,6 +15177,158 @@
               <a:t>    mv   a1, s0</a:t>
             </a:r>
             <a:endParaRPr lang="en-US" sz="1200" dirty="0"/>
+          </a:p>
+        </p:txBody>
+      </p:sp>
+      <p:sp>
+        <p:nvSpPr>
+          <p:cNvPr id="5" name="Shape 3"/>
+          <p:cNvSpPr/>
+          <p:nvPr/>
+        </p:nvSpPr>
+        <p:spPr>
+          <a:xfrm>
+            <a:off x="7941259" y="91440"/>
+            <a:ext cx="3701796" cy="274320"/>
+          </a:xfrm>
+          <a:prstGeom prst="rect">
+            <a:avLst/>
+          </a:prstGeom>
+          <a:solidFill>
+            <a:srgbClr val="FEF3C7"/>
+          </a:solidFill>
+          <a:ln w="12700">
+            <a:solidFill>
+              <a:srgbClr val="B45309"/>
+            </a:solidFill>
+            <a:prstDash val="solid"/>
+          </a:ln>
+        </p:spPr>
+      </p:sp>
+      <p:sp>
+        <p:nvSpPr>
+          <p:cNvPr id="6" name="Shape 4"/>
+          <p:cNvSpPr/>
+          <p:nvPr/>
+        </p:nvSpPr>
+        <p:spPr>
+          <a:xfrm>
+            <a:off x="7941259" y="91440"/>
+            <a:ext cx="27432" cy="274320"/>
+          </a:xfrm>
+          <a:prstGeom prst="rect">
+            <a:avLst/>
+          </a:prstGeom>
+          <a:solidFill>
+            <a:srgbClr val="B45309"/>
+          </a:solidFill>
+          <a:ln w="12700">
+            <a:solidFill>
+              <a:srgbClr val="B45309"/>
+            </a:solidFill>
+            <a:prstDash val="solid"/>
+          </a:ln>
+        </p:spPr>
+      </p:sp>
+      <p:sp>
+        <p:nvSpPr>
+          <p:cNvPr id="7" name="Shape 5"/>
+          <p:cNvSpPr/>
+          <p:nvPr/>
+        </p:nvSpPr>
+        <p:spPr>
+          <a:xfrm>
+            <a:off x="7996123" y="91440"/>
+            <a:ext cx="27432" cy="274320"/>
+          </a:xfrm>
+          <a:prstGeom prst="rect">
+            <a:avLst/>
+          </a:prstGeom>
+          <a:solidFill>
+            <a:srgbClr val="B45309"/>
+          </a:solidFill>
+          <a:ln w="12700">
+            <a:solidFill>
+              <a:srgbClr val="B45309"/>
+            </a:solidFill>
+            <a:prstDash val="solid"/>
+          </a:ln>
+        </p:spPr>
+      </p:sp>
+      <p:pic>
+        <p:nvPicPr>
+          <p:cNvPr id="8" name="Image 0" descr="preencoded.png">    </p:cNvPr>
+          <p:cNvPicPr>
+            <a:picLocks noChangeAspect="1"/>
+          </p:cNvPicPr>
+          <p:nvPr/>
+        </p:nvPicPr>
+        <p:blipFill>
+          <a:blip r:embed="rId1"/>
+          <a:stretch>
+            <a:fillRect/>
+          </a:stretch>
+        </p:blipFill>
+        <p:spPr>
+          <a:xfrm>
+            <a:off x="8069275" y="128016"/>
+            <a:ext cx="201168" cy="201168"/>
+          </a:xfrm>
+          <a:prstGeom prst="rect">
+            <a:avLst/>
+          </a:prstGeom>
+        </p:spPr>
+      </p:pic>
+      <p:sp>
+        <p:nvSpPr>
+          <p:cNvPr id="9" name="Text 6"/>
+          <p:cNvSpPr txBox="1"/>
+          <p:nvPr/>
+        </p:nvSpPr>
+        <p:spPr>
+          <a:xfrm>
+            <a:off x="8325307" y="91440"/>
+            <a:ext cx="3281172" cy="274320"/>
+          </a:xfrm>
+          <a:prstGeom prst="rect">
+            <a:avLst/>
+          </a:prstGeom>
+          <a:noFill/>
+          <a:ln/>
+        </p:spPr>
+        <p:txBody>
+          <a:bodyPr wrap="square" lIns="0" tIns="0" rIns="0" bIns="0" rtlCol="0" anchor="ctr"/>
+          <a:lstStyle/>
+          <a:p>
+            <a:pPr indent="0" marL="0">
+              <a:buNone/>
+            </a:pPr>
+            <a:r>
+              <a:rPr lang="en-US" sz="1100" b="1" dirty="0">
+                <a:solidFill>
+                  <a:srgbClr val="92400E"/>
+                </a:solidFill>
+                <a:latin typeface="Calibri" pitchFamily="34" charset="0"/>
+                <a:ea typeface="Calibri" pitchFamily="34" charset="-122"/>
+                <a:cs typeface="Calibri" pitchFamily="34" charset="-120"/>
+              </a:rPr>
+              <a:t>DA UTILIZZARE OGGI</a:t>
+            </a:r>
+            <a:pPr indent="0" marL="0">
+              <a:buNone/>
+            </a:pPr>
+            <a:r>
+              <a:rPr lang="en-US" sz="1100" dirty="0">
+                <a:solidFill>
+                  <a:srgbClr val="92400E"/>
+                </a:solidFill>
+                <a:latin typeface="Calibri" pitchFamily="34" charset="0"/>
+                <a:ea typeface="Calibri" pitchFamily="34" charset="-122"/>
+                <a:cs typeface="Calibri" pitchFamily="34" charset="-120"/>
+              </a:rPr>
+              <a:t> · il programma completo</a:t>
+            </a:r>
+            <a:endParaRPr lang="en-US" sz="1100" dirty="0"/>
           </a:p>
         </p:txBody>
       </p:sp>

--- a/it/slides/09-Architettura_dei_Calcolatori-Algebra_di_Boole_2-Codice.pptx
+++ b/it/slides/09-Architettura_dei_Calcolatori-Algebra_di_Boole_2-Codice.pptx
@@ -122,23 +122,23 @@
   <p:extLst>
     <p:ext uri="{521415D9-36F7-43E2-AB2F-B90AF26B5E84}">
       <p14:sectionLst xmlns:p14="http://schemas.microsoft.com/office/powerpoint/2010/main">
-        <p14:section name="Apertura" id="{2a72842c-c373-a774-e3e2-88a1d4fa3dbf}">
+        <p14:section name="Apertura" id="{507f4422-98d7-9e11-d6ad-eff755b1e6e2}">
           <p14:sldIdLst>
             <p14:sldId id="256"/>
             <p14:sldId id="257"/>
           </p14:sldIdLst>
         </p14:section>
-        <p14:section name="Riscaldamento sulla macchina" id="{a4b9c61d-a81d-d66f-f2ba-24cce4a5995c}">
+        <p14:section name="Riscaldamento sulla macchina" id="{4340f499-2fad-0a75-8b8f-b07fc53501df}">
           <p14:sldIdLst>
             <p14:sldId id="258"/>
           </p14:sldIdLst>
         </p14:section>
-        <p14:section name="Ritorno alla macchina" id="{1d4057fc-49f4-6327-308a-2431bb4c4abc}">
+        <p14:section name="Ritorno alla macchina" id="{48325391-4652-ac9b-3549-3af8e92bd377}">
           <p14:sldIdLst>
             <p14:sldId id="259"/>
           </p14:sldIdLst>
         </p14:section>
-        <p14:section name="Il programma completo" id="{2033dcfe-4874-f314-df80-143dd51a08c9}">
+        <p14:section name="Il programma completo" id="{768ef265-a300-23f8-cd51-cec5f59ffd14}">
           <p14:sldIdLst>
             <p14:sldId id="260"/>
             <p14:sldId id="261"/>
@@ -148,7 +148,7 @@
             <p14:sldId id="265"/>
           </p14:sldIdLst>
         </p14:section>
-        <p14:section name="Eseguire e provare" id="{c68242b2-1466-a15f-e3b4-da651780c3bf}">
+        <p14:section name="Eseguire e provare" id="{b06cc883-7f65-d0ee-69dd-24d221772032}">
           <p14:sldIdLst>
             <p14:sldId id="266"/>
             <p14:sldId id="267"/>
@@ -157,7 +157,7 @@
             <p14:sldId id="270"/>
           </p14:sldIdLst>
         </p14:section>
-        <p14:section name="Esercizi" id="{e5719580-69b7-a2c2-3014-c58b260a4a28}">
+        <p14:section name="Esercizi" id="{ade2430b-e15a-1775-ea78-fedd1e9637ff}">
           <p14:sldIdLst>
             <p14:sldId id="271"/>
           </p14:sldIdLst>
